--- a/docs/tema1/diapositivas/operaciones-crud-transacciones.pptx
+++ b/docs/tema1/diapositivas/operaciones-crud-transacciones.pptx
@@ -5,7 +5,7 @@
     <p:sldMasterId id="2147483648" r:id="rId1"/>
   </p:sldMasterIdLst>
   <p:notesMasterIdLst>
-    <p:notesMasterId r:id="rId46"/>
+    <p:notesMasterId r:id="rId47"/>
   </p:notesMasterIdLst>
   <p:sldIdLst>
     <p:sldId id="256" r:id="rId2"/>
@@ -25,33 +25,34 @@
     <p:sldId id="270" r:id="rId16"/>
     <p:sldId id="271" r:id="rId17"/>
     <p:sldId id="272" r:id="rId18"/>
-    <p:sldId id="273" r:id="rId19"/>
-    <p:sldId id="274" r:id="rId20"/>
-    <p:sldId id="275" r:id="rId21"/>
-    <p:sldId id="276" r:id="rId22"/>
-    <p:sldId id="277" r:id="rId23"/>
-    <p:sldId id="278" r:id="rId24"/>
-    <p:sldId id="279" r:id="rId25"/>
-    <p:sldId id="280" r:id="rId26"/>
-    <p:sldId id="281" r:id="rId27"/>
-    <p:sldId id="282" r:id="rId28"/>
-    <p:sldId id="283" r:id="rId29"/>
-    <p:sldId id="284" r:id="rId30"/>
-    <p:sldId id="285" r:id="rId31"/>
-    <p:sldId id="286" r:id="rId32"/>
-    <p:sldId id="287" r:id="rId33"/>
-    <p:sldId id="288" r:id="rId34"/>
-    <p:sldId id="289" r:id="rId35"/>
-    <p:sldId id="290" r:id="rId36"/>
-    <p:sldId id="291" r:id="rId37"/>
-    <p:sldId id="292" r:id="rId38"/>
-    <p:sldId id="293" r:id="rId39"/>
-    <p:sldId id="294" r:id="rId40"/>
-    <p:sldId id="295" r:id="rId41"/>
-    <p:sldId id="296" r:id="rId42"/>
-    <p:sldId id="297" r:id="rId43"/>
-    <p:sldId id="298" r:id="rId44"/>
-    <p:sldId id="299" r:id="rId45"/>
+    <p:sldId id="300" r:id="rId19"/>
+    <p:sldId id="273" r:id="rId20"/>
+    <p:sldId id="274" r:id="rId21"/>
+    <p:sldId id="275" r:id="rId22"/>
+    <p:sldId id="276" r:id="rId23"/>
+    <p:sldId id="277" r:id="rId24"/>
+    <p:sldId id="278" r:id="rId25"/>
+    <p:sldId id="279" r:id="rId26"/>
+    <p:sldId id="280" r:id="rId27"/>
+    <p:sldId id="281" r:id="rId28"/>
+    <p:sldId id="282" r:id="rId29"/>
+    <p:sldId id="283" r:id="rId30"/>
+    <p:sldId id="284" r:id="rId31"/>
+    <p:sldId id="285" r:id="rId32"/>
+    <p:sldId id="286" r:id="rId33"/>
+    <p:sldId id="287" r:id="rId34"/>
+    <p:sldId id="288" r:id="rId35"/>
+    <p:sldId id="289" r:id="rId36"/>
+    <p:sldId id="290" r:id="rId37"/>
+    <p:sldId id="291" r:id="rId38"/>
+    <p:sldId id="292" r:id="rId39"/>
+    <p:sldId id="293" r:id="rId40"/>
+    <p:sldId id="294" r:id="rId41"/>
+    <p:sldId id="295" r:id="rId42"/>
+    <p:sldId id="296" r:id="rId43"/>
+    <p:sldId id="297" r:id="rId44"/>
+    <p:sldId id="298" r:id="rId45"/>
+    <p:sldId id="299" r:id="rId46"/>
   </p:sldIdLst>
   <p:sldSz cx="12192000" cy="6858000"/>
   <p:notesSz cx="6858000" cy="12192000"/>
@@ -1041,7 +1042,13 @@
   <p:cSld>
     <p:spTree>
       <p:nvGrpSpPr>
-        <p:cNvPr id="1" name=""/>
+        <p:cNvPr id="1" name="">
+          <a:extLst>
+            <a:ext uri="{FF2B5EF4-FFF2-40B4-BE49-F238E27FC236}">
+              <a16:creationId xmlns:a16="http://schemas.microsoft.com/office/drawing/2014/main" id="{7D1E86E5-32A3-6876-1FB9-FB44ED8364DB}"/>
+            </a:ext>
+          </a:extLst>
+        </p:cNvPr>
         <p:cNvGrpSpPr/>
         <p:nvPr/>
       </p:nvGrpSpPr>
@@ -1055,7 +1062,13 @@
       </p:grpSpPr>
       <p:sp>
         <p:nvSpPr>
-          <p:cNvPr id="2" name="Slide Image Placeholder 1"/>
+          <p:cNvPr id="2" name="Slide Image Placeholder 1">
+            <a:extLst>
+              <a:ext uri="{FF2B5EF4-FFF2-40B4-BE49-F238E27FC236}">
+                <a16:creationId xmlns:a16="http://schemas.microsoft.com/office/drawing/2014/main" id="{BE3C60E9-C0DB-BE95-9730-242F633724ED}"/>
+              </a:ext>
+            </a:extLst>
+          </p:cNvPr>
           <p:cNvSpPr>
             <a:spLocks noGrp="1" noRot="1" noChangeAspect="1"/>
           </p:cNvSpPr>
@@ -1067,7 +1080,13 @@
       </p:sp>
       <p:sp>
         <p:nvSpPr>
-          <p:cNvPr id="3" name="Notes Placeholder 2"/>
+          <p:cNvPr id="3" name="Notes Placeholder 2">
+            <a:extLst>
+              <a:ext uri="{FF2B5EF4-FFF2-40B4-BE49-F238E27FC236}">
+                <a16:creationId xmlns:a16="http://schemas.microsoft.com/office/drawing/2014/main" id="{9B41F73B-3957-85A7-1A55-570C4FA7B243}"/>
+              </a:ext>
+            </a:extLst>
+          </p:cNvPr>
           <p:cNvSpPr>
             <a:spLocks noGrp="1"/>
           </p:cNvSpPr>
@@ -1086,7 +1105,13 @@
       </p:sp>
       <p:sp>
         <p:nvSpPr>
-          <p:cNvPr id="4" name="Slide Number Placeholder 3"/>
+          <p:cNvPr id="4" name="Slide Number Placeholder 3">
+            <a:extLst>
+              <a:ext uri="{FF2B5EF4-FFF2-40B4-BE49-F238E27FC236}">
+                <a16:creationId xmlns:a16="http://schemas.microsoft.com/office/drawing/2014/main" id="{1FA09C71-8342-A854-A346-761AE179C513}"/>
+              </a:ext>
+            </a:extLst>
+          </p:cNvPr>
           <p:cNvSpPr>
             <a:spLocks noGrp="1"/>
           </p:cNvSpPr>
@@ -1110,7 +1135,7 @@
     </p:spTree>
     <p:extLst>
       <p:ext uri="{BB962C8B-B14F-4D97-AF65-F5344CB8AC3E}">
-        <p14:creationId xmlns:p14="http://schemas.microsoft.com/office/powerpoint/2010/main" val="1024086991"/>
+        <p14:creationId xmlns:p14="http://schemas.microsoft.com/office/powerpoint/2010/main" val="3474787025"/>
       </p:ext>
     </p:extLst>
   </p:cSld>
@@ -3538,6 +3563,90 @@
             <a:fld id="{F7021451-1387-4CA6-816F-3879F97B5CBC}" type="slidenum">
               <a:rPr lang="en-US"/>
               <a:t>44</a:t>
+            </a:fld>
+            <a:endParaRPr lang="en-US"/>
+          </a:p>
+        </p:txBody>
+      </p:sp>
+    </p:spTree>
+    <p:extLst>
+      <p:ext uri="{BB962C8B-B14F-4D97-AF65-F5344CB8AC3E}">
+        <p14:creationId xmlns:p14="http://schemas.microsoft.com/office/powerpoint/2010/main" val="1024086991"/>
+      </p:ext>
+    </p:extLst>
+  </p:cSld>
+  <p:clrMapOvr>
+    <a:masterClrMapping/>
+  </p:clrMapOvr>
+</p:notes>
+</file>
+
+<file path=ppt/notesSlides/notesSlide45.xml><?xml version="1.0" encoding="utf-8"?>
+<p:notes xmlns:a="http://schemas.openxmlformats.org/drawingml/2006/main" xmlns:r="http://schemas.openxmlformats.org/officeDocument/2006/relationships" xmlns:p="http://schemas.openxmlformats.org/presentationml/2006/main">
+  <p:cSld>
+    <p:spTree>
+      <p:nvGrpSpPr>
+        <p:cNvPr id="1" name=""/>
+        <p:cNvGrpSpPr/>
+        <p:nvPr/>
+      </p:nvGrpSpPr>
+      <p:grpSpPr>
+        <a:xfrm>
+          <a:off x="0" y="0"/>
+          <a:ext cx="0" cy="0"/>
+          <a:chOff x="0" y="0"/>
+          <a:chExt cx="0" cy="0"/>
+        </a:xfrm>
+      </p:grpSpPr>
+      <p:sp>
+        <p:nvSpPr>
+          <p:cNvPr id="2" name="Slide Image Placeholder 1"/>
+          <p:cNvSpPr>
+            <a:spLocks noGrp="1" noRot="1" noChangeAspect="1"/>
+          </p:cNvSpPr>
+          <p:nvPr>
+            <p:ph type="sldImg"/>
+          </p:nvPr>
+        </p:nvSpPr>
+        <p:spPr/>
+      </p:sp>
+      <p:sp>
+        <p:nvSpPr>
+          <p:cNvPr id="3" name="Notes Placeholder 2"/>
+          <p:cNvSpPr>
+            <a:spLocks noGrp="1"/>
+          </p:cNvSpPr>
+          <p:nvPr>
+            <p:ph type="body" idx="1"/>
+          </p:nvPr>
+        </p:nvSpPr>
+        <p:spPr/>
+        <p:txBody>
+          <a:bodyPr/>
+          <a:lstStyle/>
+          <a:p>
+            <a:endParaRPr lang="en-US" dirty="0"/>
+          </a:p>
+        </p:txBody>
+      </p:sp>
+      <p:sp>
+        <p:nvSpPr>
+          <p:cNvPr id="4" name="Slide Number Placeholder 3"/>
+          <p:cNvSpPr>
+            <a:spLocks noGrp="1"/>
+          </p:cNvSpPr>
+          <p:nvPr>
+            <p:ph type="sldNum" sz="quarter" idx="10"/>
+          </p:nvPr>
+        </p:nvSpPr>
+        <p:spPr/>
+        <p:txBody>
+          <a:bodyPr/>
+          <a:lstStyle/>
+          <a:p>
+            <a:fld id="{F7021451-1387-4CA6-816F-3879F97B5CBC}" type="slidenum">
+              <a:rPr lang="en-US"/>
+              <a:t>45</a:t>
             </a:fld>
             <a:endParaRPr lang="en-US"/>
           </a:p>
@@ -8627,7 +8736,7 @@
         </p:nvSpPr>
         <p:spPr>
           <a:xfrm>
-            <a:off x="548640" y="1920240"/>
+            <a:off x="548640" y="1211580"/>
             <a:ext cx="11091672" cy="1417320"/>
           </a:xfrm>
           <a:prstGeom prst="rect">
@@ -8652,154 +8761,41 @@
                 <a:ea typeface="Arial" pitchFamily="34" charset="-122"/>
                 <a:cs typeface="Arial" pitchFamily="34" charset="-120"/>
               </a:rPr>
-              <a:t>Un DTO (Data Transfer Object) es un objeto hecho a medida de lo que sale (o entra) de tu aplicación. Antes de escribirlo, una construcción que encaja perfectamente: el record (desde Java 16), que declara en una línea una clase inmutable:</a:t>
-            </a:r>
-            <a:endParaRPr lang="en-US" sz="2000" dirty="0"/>
-          </a:p>
-        </p:txBody>
-      </p:sp>
-      <p:sp>
-        <p:nvSpPr>
-          <p:cNvPr id="6" name="Shape 4"/>
-          <p:cNvSpPr/>
+              <a:t>Un DTO (Data Transfer Object) es un objeto hecho a medida de lo que sale (o entra) de tu aplicación. </a:t>
+            </a:r>
+          </a:p>
+        </p:txBody>
+      </p:sp>
+      <p:pic>
+        <p:nvPicPr>
+          <p:cNvPr id="11" name="Imagen 10">
+            <a:extLst>
+              <a:ext uri="{FF2B5EF4-FFF2-40B4-BE49-F238E27FC236}">
+                <a16:creationId xmlns:a16="http://schemas.microsoft.com/office/drawing/2014/main" id="{DA21D6E5-1E8D-6E10-1DE0-BF37B2E033A3}"/>
+              </a:ext>
+            </a:extLst>
+          </p:cNvPr>
+          <p:cNvPicPr>
+            <a:picLocks noChangeAspect="1"/>
+          </p:cNvPicPr>
           <p:nvPr/>
-        </p:nvSpPr>
+        </p:nvPicPr>
+        <p:blipFill>
+          <a:blip r:embed="rId3"/>
+          <a:stretch>
+            <a:fillRect/>
+          </a:stretch>
+        </p:blipFill>
         <p:spPr>
           <a:xfrm>
-            <a:off x="548640" y="3657600"/>
-            <a:ext cx="11091672" cy="640080"/>
+            <a:off x="2230793" y="1728755"/>
+            <a:ext cx="7501036" cy="5000691"/>
           </a:xfrm>
           <a:prstGeom prst="rect">
             <a:avLst/>
           </a:prstGeom>
-          <a:solidFill>
-            <a:srgbClr val="ECEFF1"/>
-          </a:solidFill>
-          <a:ln w="12700">
-            <a:solidFill>
-              <a:srgbClr val="EEEEEE"/>
-            </a:solidFill>
-            <a:prstDash val="solid"/>
-          </a:ln>
         </p:spPr>
-        <p:txBody>
-          <a:bodyPr/>
-          <a:lstStyle/>
-          <a:p>
-            <a:endParaRPr lang="es-ES"/>
-          </a:p>
-        </p:txBody>
-      </p:sp>
-      <p:sp>
-        <p:nvSpPr>
-          <p:cNvPr id="7" name="Shape 5"/>
-          <p:cNvSpPr/>
-          <p:nvPr/>
-        </p:nvSpPr>
-        <p:spPr>
-          <a:xfrm>
-            <a:off x="548640" y="3657600"/>
-            <a:ext cx="73152" cy="640080"/>
-          </a:xfrm>
-          <a:prstGeom prst="rect">
-            <a:avLst/>
-          </a:prstGeom>
-          <a:solidFill>
-            <a:srgbClr val="E64A19"/>
-          </a:solidFill>
-          <a:ln w="12700">
-            <a:solidFill>
-              <a:srgbClr val="E64A19"/>
-            </a:solidFill>
-            <a:prstDash val="solid"/>
-          </a:ln>
-        </p:spPr>
-        <p:txBody>
-          <a:bodyPr/>
-          <a:lstStyle/>
-          <a:p>
-            <a:endParaRPr lang="es-ES"/>
-          </a:p>
-        </p:txBody>
-      </p:sp>
-      <p:sp>
-        <p:nvSpPr>
-          <p:cNvPr id="8" name="Text 6"/>
-          <p:cNvSpPr/>
-          <p:nvPr/>
-        </p:nvSpPr>
-        <p:spPr>
-          <a:xfrm>
-            <a:off x="822960" y="3767328"/>
-            <a:ext cx="10588752" cy="420624"/>
-          </a:xfrm>
-          <a:prstGeom prst="rect">
-            <a:avLst/>
-          </a:prstGeom>
-          <a:noFill/>
-          <a:ln/>
-        </p:spPr>
-        <p:txBody>
-          <a:bodyPr wrap="square" rtlCol="0" anchor="t"/>
-          <a:lstStyle/>
-          <a:p>
-            <a:pPr marL="0" indent="0">
-              <a:buNone/>
-            </a:pPr>
-            <a:r>
-              <a:rPr lang="en-US" sz="1800" dirty="0">
-                <a:solidFill>
-                  <a:srgbClr val="263238"/>
-                </a:solidFill>
-                <a:latin typeface="Courier New" pitchFamily="34" charset="0"/>
-                <a:ea typeface="Courier New" pitchFamily="34" charset="-122"/>
-                <a:cs typeface="Courier New" pitchFamily="34" charset="-120"/>
-              </a:rPr>
-              <a:t>record Punto(int x, int y) {}</a:t>
-            </a:r>
-            <a:endParaRPr lang="en-US" sz="1800" dirty="0"/>
-          </a:p>
-        </p:txBody>
-      </p:sp>
-      <p:sp>
-        <p:nvSpPr>
-          <p:cNvPr id="9" name="Text 7"/>
-          <p:cNvSpPr/>
-          <p:nvPr/>
-        </p:nvSpPr>
-        <p:spPr>
-          <a:xfrm>
-            <a:off x="548640" y="4617720"/>
-            <a:ext cx="11091672" cy="1234440"/>
-          </a:xfrm>
-          <a:prstGeom prst="rect">
-            <a:avLst/>
-          </a:prstGeom>
-          <a:noFill/>
-          <a:ln/>
-        </p:spPr>
-        <p:txBody>
-          <a:bodyPr wrap="square" rtlCol="0" anchor="t"/>
-          <a:lstStyle/>
-          <a:p>
-            <a:pPr marL="0" indent="0">
-              <a:buNone/>
-            </a:pPr>
-            <a:r>
-              <a:rPr lang="en-US" sz="1900" dirty="0">
-                <a:solidFill>
-                  <a:srgbClr val="757575"/>
-                </a:solidFill>
-                <a:latin typeface="Arial" pitchFamily="34" charset="0"/>
-                <a:ea typeface="Arial" pitchFamily="34" charset="-122"/>
-                <a:cs typeface="Arial" pitchFamily="34" charset="-120"/>
-              </a:rPr>
-              <a:t>El compilador genera automáticamente un constructor, un getter por campo (punto.x(), no punto.getX()) y equals()/hashCode()/toString(). Todos los campos son final — no hay setters. Esa inmutabilidad es justo lo que necesitas para un DTO.</a:t>
-            </a:r>
-            <a:endParaRPr lang="en-US" sz="1900" dirty="0"/>
-          </a:p>
-        </p:txBody>
-      </p:sp>
+      </p:pic>
     </p:spTree>
   </p:cSld>
   <p:clrMapOvr>
@@ -8810,10 +8806,16 @@
 
 <file path=ppt/slides/slide18.xml><?xml version="1.0" encoding="utf-8"?>
 <p:sld xmlns:a="http://schemas.openxmlformats.org/drawingml/2006/main" xmlns:r="http://schemas.openxmlformats.org/officeDocument/2006/relationships" xmlns:p="http://schemas.openxmlformats.org/presentationml/2006/main">
-  <p:cSld name="Slide 18">
+  <p:cSld>
     <p:spTree>
       <p:nvGrpSpPr>
-        <p:cNvPr id="1" name=""/>
+        <p:cNvPr id="1" name="">
+          <a:extLst>
+            <a:ext uri="{FF2B5EF4-FFF2-40B4-BE49-F238E27FC236}">
+              <a16:creationId xmlns:a16="http://schemas.microsoft.com/office/drawing/2014/main" id="{EEC322EA-0AC4-6C32-90D4-477820C6A1A3}"/>
+            </a:ext>
+          </a:extLst>
+        </p:cNvPr>
         <p:cNvGrpSpPr/>
         <p:nvPr/>
       </p:nvGrpSpPr>
@@ -8827,7 +8829,13 @@
       </p:grpSpPr>
       <p:sp>
         <p:nvSpPr>
-          <p:cNvPr id="2" name="Shape 0"/>
+          <p:cNvPr id="2" name="Shape 0">
+            <a:extLst>
+              <a:ext uri="{FF2B5EF4-FFF2-40B4-BE49-F238E27FC236}">
+                <a16:creationId xmlns:a16="http://schemas.microsoft.com/office/drawing/2014/main" id="{51B80B47-DF87-53D5-755E-7EC21AAA541C}"/>
+              </a:ext>
+            </a:extLst>
+          </p:cNvPr>
           <p:cNvSpPr/>
           <p:nvPr/>
         </p:nvSpPr>
@@ -8859,6 +8867,382 @@
       </p:sp>
       <p:sp>
         <p:nvSpPr>
+          <p:cNvPr id="3" name="Text 1">
+            <a:extLst>
+              <a:ext uri="{FF2B5EF4-FFF2-40B4-BE49-F238E27FC236}">
+                <a16:creationId xmlns:a16="http://schemas.microsoft.com/office/drawing/2014/main" id="{B56AEAC8-43A6-6BFF-3E2C-FF78A9462BD6}"/>
+              </a:ext>
+            </a:extLst>
+          </p:cNvPr>
+          <p:cNvSpPr/>
+          <p:nvPr/>
+        </p:nvSpPr>
+        <p:spPr>
+          <a:xfrm>
+            <a:off x="365760" y="0"/>
+            <a:ext cx="11457432" cy="777240"/>
+          </a:xfrm>
+          <a:prstGeom prst="rect">
+            <a:avLst/>
+          </a:prstGeom>
+          <a:noFill/>
+          <a:ln/>
+        </p:spPr>
+        <p:txBody>
+          <a:bodyPr wrap="square" rtlCol="0" anchor="ctr"/>
+          <a:lstStyle/>
+          <a:p>
+            <a:pPr marL="0" indent="0">
+              <a:buNone/>
+            </a:pPr>
+            <a:r>
+              <a:rPr lang="en-US" sz="2600" b="1" dirty="0">
+                <a:solidFill>
+                  <a:srgbClr val="FFFFFF"/>
+                </a:solidFill>
+                <a:latin typeface="Arial" pitchFamily="34" charset="0"/>
+                <a:ea typeface="Arial" pitchFamily="34" charset="-122"/>
+                <a:cs typeface="Arial" pitchFamily="34" charset="-120"/>
+              </a:rPr>
+              <a:t>La solución: DTOs</a:t>
+            </a:r>
+            <a:endParaRPr lang="en-US" sz="2600" dirty="0"/>
+          </a:p>
+        </p:txBody>
+      </p:sp>
+      <p:sp>
+        <p:nvSpPr>
+          <p:cNvPr id="4" name="Text 2">
+            <a:extLst>
+              <a:ext uri="{FF2B5EF4-FFF2-40B4-BE49-F238E27FC236}">
+                <a16:creationId xmlns:a16="http://schemas.microsoft.com/office/drawing/2014/main" id="{AF7FF9C5-8ADF-663F-2993-29715D8549DA}"/>
+              </a:ext>
+            </a:extLst>
+          </p:cNvPr>
+          <p:cNvSpPr/>
+          <p:nvPr/>
+        </p:nvSpPr>
+        <p:spPr>
+          <a:xfrm>
+            <a:off x="548640" y="6473952"/>
+            <a:ext cx="11091672" cy="292608"/>
+          </a:xfrm>
+          <a:prstGeom prst="rect">
+            <a:avLst/>
+          </a:prstGeom>
+          <a:noFill/>
+          <a:ln/>
+        </p:spPr>
+        <p:txBody>
+          <a:bodyPr wrap="square" rtlCol="0" anchor="ctr"/>
+          <a:lstStyle/>
+          <a:p>
+            <a:pPr marL="0" indent="0" algn="r">
+              <a:buNone/>
+            </a:pPr>
+            <a:r>
+              <a:rPr lang="en-US" sz="1100" dirty="0">
+                <a:solidFill>
+                  <a:srgbClr val="757575"/>
+                </a:solidFill>
+                <a:latin typeface="Arial" pitchFamily="34" charset="0"/>
+                <a:ea typeface="Arial" pitchFamily="34" charset="-122"/>
+                <a:cs typeface="Arial" pitchFamily="34" charset="-120"/>
+              </a:rPr>
+              <a:t>Acceso a Datos — Tema 1: CRUD y transacciones</a:t>
+            </a:r>
+            <a:endParaRPr lang="en-US" sz="1100" dirty="0"/>
+          </a:p>
+        </p:txBody>
+      </p:sp>
+      <p:sp>
+        <p:nvSpPr>
+          <p:cNvPr id="5" name="Text 3">
+            <a:extLst>
+              <a:ext uri="{FF2B5EF4-FFF2-40B4-BE49-F238E27FC236}">
+                <a16:creationId xmlns:a16="http://schemas.microsoft.com/office/drawing/2014/main" id="{A8D9ED13-D440-FB96-F165-F4DF11EAD278}"/>
+              </a:ext>
+            </a:extLst>
+          </p:cNvPr>
+          <p:cNvSpPr/>
+          <p:nvPr/>
+        </p:nvSpPr>
+        <p:spPr>
+          <a:xfrm>
+            <a:off x="548640" y="1399032"/>
+            <a:ext cx="11091672" cy="1417320"/>
+          </a:xfrm>
+          <a:prstGeom prst="rect">
+            <a:avLst/>
+          </a:prstGeom>
+          <a:noFill/>
+          <a:ln/>
+        </p:spPr>
+        <p:txBody>
+          <a:bodyPr wrap="square" rtlCol="0" anchor="t"/>
+          <a:lstStyle/>
+          <a:p>
+            <a:pPr marL="0" indent="0">
+              <a:buNone/>
+            </a:pPr>
+            <a:endParaRPr lang="en-US" sz="2000" dirty="0">
+              <a:solidFill>
+                <a:srgbClr val="212121"/>
+              </a:solidFill>
+              <a:latin typeface="Arial" pitchFamily="34" charset="0"/>
+              <a:ea typeface="Arial" pitchFamily="34" charset="-122"/>
+              <a:cs typeface="Arial" pitchFamily="34" charset="-120"/>
+            </a:endParaRPr>
+          </a:p>
+          <a:p>
+            <a:pPr marL="0" indent="0">
+              <a:buNone/>
+            </a:pPr>
+            <a:r>
+              <a:rPr lang="en-US" sz="2000" dirty="0">
+                <a:solidFill>
+                  <a:srgbClr val="212121"/>
+                </a:solidFill>
+                <a:latin typeface="Arial" pitchFamily="34" charset="0"/>
+                <a:ea typeface="Arial" pitchFamily="34" charset="-122"/>
+                <a:cs typeface="Arial" pitchFamily="34" charset="-120"/>
+              </a:rPr>
+              <a:t>Antes de escribirlo, una construcción que encaja perfectamente: el record (desde Java 16), que declara en una línea una clase inmutable:</a:t>
+            </a:r>
+            <a:endParaRPr lang="en-US" sz="2000" dirty="0"/>
+          </a:p>
+        </p:txBody>
+      </p:sp>
+      <p:sp>
+        <p:nvSpPr>
+          <p:cNvPr id="6" name="Shape 4">
+            <a:extLst>
+              <a:ext uri="{FF2B5EF4-FFF2-40B4-BE49-F238E27FC236}">
+                <a16:creationId xmlns:a16="http://schemas.microsoft.com/office/drawing/2014/main" id="{ED69E927-3B03-5422-48A0-1BC985EB0BA9}"/>
+              </a:ext>
+            </a:extLst>
+          </p:cNvPr>
+          <p:cNvSpPr/>
+          <p:nvPr/>
+        </p:nvSpPr>
+        <p:spPr>
+          <a:xfrm>
+            <a:off x="548640" y="2827174"/>
+            <a:ext cx="11091672" cy="640080"/>
+          </a:xfrm>
+          <a:prstGeom prst="rect">
+            <a:avLst/>
+          </a:prstGeom>
+          <a:solidFill>
+            <a:srgbClr val="ECEFF1"/>
+          </a:solidFill>
+          <a:ln w="12700">
+            <a:solidFill>
+              <a:srgbClr val="EEEEEE"/>
+            </a:solidFill>
+            <a:prstDash val="solid"/>
+          </a:ln>
+        </p:spPr>
+        <p:txBody>
+          <a:bodyPr/>
+          <a:lstStyle/>
+          <a:p>
+            <a:endParaRPr lang="es-ES"/>
+          </a:p>
+        </p:txBody>
+      </p:sp>
+      <p:sp>
+        <p:nvSpPr>
+          <p:cNvPr id="7" name="Shape 5">
+            <a:extLst>
+              <a:ext uri="{FF2B5EF4-FFF2-40B4-BE49-F238E27FC236}">
+                <a16:creationId xmlns:a16="http://schemas.microsoft.com/office/drawing/2014/main" id="{F4D62E72-28D9-F5D0-BFF3-1DE75FCA1F81}"/>
+              </a:ext>
+            </a:extLst>
+          </p:cNvPr>
+          <p:cNvSpPr/>
+          <p:nvPr/>
+        </p:nvSpPr>
+        <p:spPr>
+          <a:xfrm>
+            <a:off x="548640" y="2827174"/>
+            <a:ext cx="73152" cy="640080"/>
+          </a:xfrm>
+          <a:prstGeom prst="rect">
+            <a:avLst/>
+          </a:prstGeom>
+          <a:solidFill>
+            <a:srgbClr val="E64A19"/>
+          </a:solidFill>
+          <a:ln w="12700">
+            <a:solidFill>
+              <a:srgbClr val="E64A19"/>
+            </a:solidFill>
+            <a:prstDash val="solid"/>
+          </a:ln>
+        </p:spPr>
+        <p:txBody>
+          <a:bodyPr/>
+          <a:lstStyle/>
+          <a:p>
+            <a:endParaRPr lang="es-ES"/>
+          </a:p>
+        </p:txBody>
+      </p:sp>
+      <p:sp>
+        <p:nvSpPr>
+          <p:cNvPr id="8" name="Text 6">
+            <a:extLst>
+              <a:ext uri="{FF2B5EF4-FFF2-40B4-BE49-F238E27FC236}">
+                <a16:creationId xmlns:a16="http://schemas.microsoft.com/office/drawing/2014/main" id="{DF52EE8E-DB44-196D-D063-E3790B45F552}"/>
+              </a:ext>
+            </a:extLst>
+          </p:cNvPr>
+          <p:cNvSpPr/>
+          <p:nvPr/>
+        </p:nvSpPr>
+        <p:spPr>
+          <a:xfrm>
+            <a:off x="822960" y="2936902"/>
+            <a:ext cx="10588752" cy="420624"/>
+          </a:xfrm>
+          <a:prstGeom prst="rect">
+            <a:avLst/>
+          </a:prstGeom>
+          <a:noFill/>
+          <a:ln/>
+        </p:spPr>
+        <p:txBody>
+          <a:bodyPr wrap="square" rtlCol="0" anchor="t"/>
+          <a:lstStyle/>
+          <a:p>
+            <a:pPr marL="0" indent="0">
+              <a:buNone/>
+            </a:pPr>
+            <a:r>
+              <a:rPr lang="en-US" sz="1800" dirty="0">
+                <a:solidFill>
+                  <a:srgbClr val="263238"/>
+                </a:solidFill>
+                <a:latin typeface="Courier New" pitchFamily="34" charset="0"/>
+                <a:ea typeface="Courier New" pitchFamily="34" charset="-122"/>
+                <a:cs typeface="Courier New" pitchFamily="34" charset="-120"/>
+              </a:rPr>
+              <a:t>record Punto(int x, int y) {}</a:t>
+            </a:r>
+            <a:endParaRPr lang="en-US" sz="1800" dirty="0"/>
+          </a:p>
+        </p:txBody>
+      </p:sp>
+      <p:sp>
+        <p:nvSpPr>
+          <p:cNvPr id="9" name="Text 7">
+            <a:extLst>
+              <a:ext uri="{FF2B5EF4-FFF2-40B4-BE49-F238E27FC236}">
+                <a16:creationId xmlns:a16="http://schemas.microsoft.com/office/drawing/2014/main" id="{BA87F912-26F3-0DD4-D59B-D4814D3357C6}"/>
+              </a:ext>
+            </a:extLst>
+          </p:cNvPr>
+          <p:cNvSpPr/>
+          <p:nvPr/>
+        </p:nvSpPr>
+        <p:spPr>
+          <a:xfrm>
+            <a:off x="548640" y="3787294"/>
+            <a:ext cx="11091672" cy="1234440"/>
+          </a:xfrm>
+          <a:prstGeom prst="rect">
+            <a:avLst/>
+          </a:prstGeom>
+          <a:noFill/>
+          <a:ln/>
+        </p:spPr>
+        <p:txBody>
+          <a:bodyPr wrap="square" rtlCol="0" anchor="t"/>
+          <a:lstStyle/>
+          <a:p>
+            <a:pPr marL="0" indent="0">
+              <a:buNone/>
+            </a:pPr>
+            <a:r>
+              <a:rPr lang="en-US" sz="1900" dirty="0">
+                <a:solidFill>
+                  <a:srgbClr val="757575"/>
+                </a:solidFill>
+                <a:latin typeface="Arial" pitchFamily="34" charset="0"/>
+                <a:ea typeface="Arial" pitchFamily="34" charset="-122"/>
+                <a:cs typeface="Arial" pitchFamily="34" charset="-120"/>
+              </a:rPr>
+              <a:t>El compilador genera automáticamente un constructor, un getter por campo (punto.x(), no punto.getX()) y equals()/hashCode()/toString(). Todos los campos son final — no hay setters. Esa inmutabilidad es justo lo que necesitas para un DTO.</a:t>
+            </a:r>
+            <a:endParaRPr lang="en-US" sz="1900" dirty="0"/>
+          </a:p>
+        </p:txBody>
+      </p:sp>
+    </p:spTree>
+    <p:extLst>
+      <p:ext uri="{BB962C8B-B14F-4D97-AF65-F5344CB8AC3E}">
+        <p14:creationId xmlns:p14="http://schemas.microsoft.com/office/powerpoint/2010/main" val="1115683947"/>
+      </p:ext>
+    </p:extLst>
+  </p:cSld>
+  <p:clrMapOvr>
+    <a:masterClrMapping/>
+  </p:clrMapOvr>
+</p:sld>
+</file>
+
+<file path=ppt/slides/slide19.xml><?xml version="1.0" encoding="utf-8"?>
+<p:sld xmlns:a="http://schemas.openxmlformats.org/drawingml/2006/main" xmlns:r="http://schemas.openxmlformats.org/officeDocument/2006/relationships" xmlns:p="http://schemas.openxmlformats.org/presentationml/2006/main">
+  <p:cSld name="Slide 18">
+    <p:spTree>
+      <p:nvGrpSpPr>
+        <p:cNvPr id="1" name=""/>
+        <p:cNvGrpSpPr/>
+        <p:nvPr/>
+      </p:nvGrpSpPr>
+      <p:grpSpPr>
+        <a:xfrm>
+          <a:off x="0" y="0"/>
+          <a:ext cx="0" cy="0"/>
+          <a:chOff x="0" y="0"/>
+          <a:chExt cx="0" cy="0"/>
+        </a:xfrm>
+      </p:grpSpPr>
+      <p:sp>
+        <p:nvSpPr>
+          <p:cNvPr id="2" name="Shape 0"/>
+          <p:cNvSpPr/>
+          <p:nvPr/>
+        </p:nvSpPr>
+        <p:spPr>
+          <a:xfrm>
+            <a:off x="0" y="0"/>
+            <a:ext cx="12188952" cy="777240"/>
+          </a:xfrm>
+          <a:prstGeom prst="rect">
+            <a:avLst/>
+          </a:prstGeom>
+          <a:solidFill>
+            <a:srgbClr val="7F0000"/>
+          </a:solidFill>
+          <a:ln w="12700">
+            <a:solidFill>
+              <a:srgbClr val="7F0000"/>
+            </a:solidFill>
+            <a:prstDash val="solid"/>
+          </a:ln>
+        </p:spPr>
+        <p:txBody>
+          <a:bodyPr/>
+          <a:lstStyle/>
+          <a:p>
+            <a:endParaRPr lang="es-ES"/>
+          </a:p>
+        </p:txBody>
+      </p:sp>
+      <p:sp>
+        <p:nvSpPr>
           <p:cNvPr id="3" name="Text 1"/>
           <p:cNvSpPr/>
           <p:nvPr/>
@@ -9003,408 +9387,6 @@
               <a:t>Un record NO es lo mismo que una @Entity: Libro/Editorial siguen siendo clases normales, con @Getter/@Setter de Lombok, porque necesitan ser mutables (Hibernate las modifica) y tener un identificador gestionado por el framework. Si ves record en una clase, es un DTO; si ves @Entity, es una entidad persistente.</a:t>
             </a:r>
             <a:endParaRPr lang="en-US" sz="2100" dirty="0"/>
-          </a:p>
-        </p:txBody>
-      </p:sp>
-    </p:spTree>
-  </p:cSld>
-  <p:clrMapOvr>
-    <a:masterClrMapping/>
-  </p:clrMapOvr>
-</p:sld>
-</file>
-
-<file path=ppt/slides/slide19.xml><?xml version="1.0" encoding="utf-8"?>
-<p:sld xmlns:a="http://schemas.openxmlformats.org/drawingml/2006/main" xmlns:r="http://schemas.openxmlformats.org/officeDocument/2006/relationships" xmlns:p="http://schemas.openxmlformats.org/presentationml/2006/main">
-  <p:cSld name="Slide 19">
-    <p:spTree>
-      <p:nvGrpSpPr>
-        <p:cNvPr id="1" name=""/>
-        <p:cNvGrpSpPr/>
-        <p:nvPr/>
-      </p:nvGrpSpPr>
-      <p:grpSpPr>
-        <a:xfrm>
-          <a:off x="0" y="0"/>
-          <a:ext cx="0" cy="0"/>
-          <a:chOff x="0" y="0"/>
-          <a:chExt cx="0" cy="0"/>
-        </a:xfrm>
-      </p:grpSpPr>
-      <p:sp>
-        <p:nvSpPr>
-          <p:cNvPr id="2" name="Shape 0"/>
-          <p:cNvSpPr/>
-          <p:nvPr/>
-        </p:nvSpPr>
-        <p:spPr>
-          <a:xfrm>
-            <a:off x="0" y="0"/>
-            <a:ext cx="12188952" cy="777240"/>
-          </a:xfrm>
-          <a:prstGeom prst="rect">
-            <a:avLst/>
-          </a:prstGeom>
-          <a:solidFill>
-            <a:srgbClr val="7F0000"/>
-          </a:solidFill>
-          <a:ln w="12700">
-            <a:solidFill>
-              <a:srgbClr val="7F0000"/>
-            </a:solidFill>
-            <a:prstDash val="solid"/>
-          </a:ln>
-        </p:spPr>
-        <p:txBody>
-          <a:bodyPr/>
-          <a:lstStyle/>
-          <a:p>
-            <a:endParaRPr lang="es-ES"/>
-          </a:p>
-        </p:txBody>
-      </p:sp>
-      <p:sp>
-        <p:nvSpPr>
-          <p:cNvPr id="3" name="Text 1"/>
-          <p:cNvSpPr/>
-          <p:nvPr/>
-        </p:nvSpPr>
-        <p:spPr>
-          <a:xfrm>
-            <a:off x="365760" y="0"/>
-            <a:ext cx="11457432" cy="777240"/>
-          </a:xfrm>
-          <a:prstGeom prst="rect">
-            <a:avLst/>
-          </a:prstGeom>
-          <a:noFill/>
-          <a:ln/>
-        </p:spPr>
-        <p:txBody>
-          <a:bodyPr wrap="square" rtlCol="0" anchor="ctr"/>
-          <a:lstStyle/>
-          <a:p>
-            <a:pPr marL="0" indent="0">
-              <a:buNone/>
-            </a:pPr>
-            <a:r>
-              <a:rPr lang="en-US" sz="2600" b="1" dirty="0">
-                <a:solidFill>
-                  <a:srgbClr val="FFFFFF"/>
-                </a:solidFill>
-                <a:latin typeface="Arial" pitchFamily="34" charset="0"/>
-                <a:ea typeface="Arial" pitchFamily="34" charset="-122"/>
-                <a:cs typeface="Arial" pitchFamily="34" charset="-120"/>
-              </a:rPr>
-              <a:t>El DTO de salida</a:t>
-            </a:r>
-            <a:endParaRPr lang="en-US" sz="2600" dirty="0"/>
-          </a:p>
-        </p:txBody>
-      </p:sp>
-      <p:sp>
-        <p:nvSpPr>
-          <p:cNvPr id="4" name="Text 2"/>
-          <p:cNvSpPr/>
-          <p:nvPr/>
-        </p:nvSpPr>
-        <p:spPr>
-          <a:xfrm>
-            <a:off x="548640" y="6473952"/>
-            <a:ext cx="11091672" cy="292608"/>
-          </a:xfrm>
-          <a:prstGeom prst="rect">
-            <a:avLst/>
-          </a:prstGeom>
-          <a:noFill/>
-          <a:ln/>
-        </p:spPr>
-        <p:txBody>
-          <a:bodyPr wrap="square" rtlCol="0" anchor="ctr"/>
-          <a:lstStyle/>
-          <a:p>
-            <a:pPr marL="0" indent="0" algn="r">
-              <a:buNone/>
-            </a:pPr>
-            <a:r>
-              <a:rPr lang="en-US" sz="1100" dirty="0">
-                <a:solidFill>
-                  <a:srgbClr val="757575"/>
-                </a:solidFill>
-                <a:latin typeface="Arial" pitchFamily="34" charset="0"/>
-                <a:ea typeface="Arial" pitchFamily="34" charset="-122"/>
-                <a:cs typeface="Arial" pitchFamily="34" charset="-120"/>
-              </a:rPr>
-              <a:t>Acceso a Datos — Tema 1: CRUD y transacciones</a:t>
-            </a:r>
-            <a:endParaRPr lang="en-US" sz="1100" dirty="0"/>
-          </a:p>
-        </p:txBody>
-      </p:sp>
-      <p:sp>
-        <p:nvSpPr>
-          <p:cNvPr id="5" name="Shape 3"/>
-          <p:cNvSpPr/>
-          <p:nvPr/>
-        </p:nvSpPr>
-        <p:spPr>
-          <a:xfrm>
-            <a:off x="548640" y="1645920"/>
-            <a:ext cx="11091672" cy="2743200"/>
-          </a:xfrm>
-          <a:prstGeom prst="rect">
-            <a:avLst/>
-          </a:prstGeom>
-          <a:solidFill>
-            <a:srgbClr val="ECEFF1"/>
-          </a:solidFill>
-          <a:ln w="12700">
-            <a:solidFill>
-              <a:srgbClr val="EEEEEE"/>
-            </a:solidFill>
-            <a:prstDash val="solid"/>
-          </a:ln>
-        </p:spPr>
-        <p:txBody>
-          <a:bodyPr/>
-          <a:lstStyle/>
-          <a:p>
-            <a:endParaRPr lang="es-ES"/>
-          </a:p>
-        </p:txBody>
-      </p:sp>
-      <p:sp>
-        <p:nvSpPr>
-          <p:cNvPr id="6" name="Shape 4"/>
-          <p:cNvSpPr/>
-          <p:nvPr/>
-        </p:nvSpPr>
-        <p:spPr>
-          <a:xfrm>
-            <a:off x="548640" y="1645920"/>
-            <a:ext cx="73152" cy="2743200"/>
-          </a:xfrm>
-          <a:prstGeom prst="rect">
-            <a:avLst/>
-          </a:prstGeom>
-          <a:solidFill>
-            <a:srgbClr val="E64A19"/>
-          </a:solidFill>
-          <a:ln w="12700">
-            <a:solidFill>
-              <a:srgbClr val="E64A19"/>
-            </a:solidFill>
-            <a:prstDash val="solid"/>
-          </a:ln>
-        </p:spPr>
-        <p:txBody>
-          <a:bodyPr/>
-          <a:lstStyle/>
-          <a:p>
-            <a:endParaRPr lang="es-ES"/>
-          </a:p>
-        </p:txBody>
-      </p:sp>
-      <p:sp>
-        <p:nvSpPr>
-          <p:cNvPr id="7" name="Text 5"/>
-          <p:cNvSpPr/>
-          <p:nvPr/>
-        </p:nvSpPr>
-        <p:spPr>
-          <a:xfrm>
-            <a:off x="822960" y="1755648"/>
-            <a:ext cx="10588752" cy="2523744"/>
-          </a:xfrm>
-          <a:prstGeom prst="rect">
-            <a:avLst/>
-          </a:prstGeom>
-          <a:noFill/>
-          <a:ln/>
-        </p:spPr>
-        <p:txBody>
-          <a:bodyPr wrap="square" rtlCol="0" anchor="t"/>
-          <a:lstStyle/>
-          <a:p>
-            <a:pPr marL="0" indent="0">
-              <a:buNone/>
-            </a:pPr>
-            <a:r>
-              <a:rPr lang="en-US" sz="1600" dirty="0">
-                <a:solidFill>
-                  <a:srgbClr val="263238"/>
-                </a:solidFill>
-                <a:latin typeface="Courier New" pitchFamily="34" charset="0"/>
-                <a:ea typeface="Courier New" pitchFamily="34" charset="-122"/>
-                <a:cs typeface="Courier New" pitchFamily="34" charset="-120"/>
-              </a:rPr>
-              <a:t>public record EditorialDTO(Long id, String nombre) {}</a:t>
-            </a:r>
-            <a:endParaRPr lang="en-US" sz="1600" dirty="0"/>
-          </a:p>
-          <a:p>
-            <a:pPr marL="0" indent="0">
-              <a:buNone/>
-            </a:pPr>
-            <a:endParaRPr lang="en-US" sz="1600" dirty="0"/>
-          </a:p>
-          <a:p>
-            <a:pPr marL="0" indent="0">
-              <a:buNone/>
-            </a:pPr>
-            <a:r>
-              <a:rPr lang="en-US" sz="1600" dirty="0">
-                <a:solidFill>
-                  <a:srgbClr val="263238"/>
-                </a:solidFill>
-                <a:latin typeface="Courier New" pitchFamily="34" charset="0"/>
-                <a:ea typeface="Courier New" pitchFamily="34" charset="-122"/>
-                <a:cs typeface="Courier New" pitchFamily="34" charset="-120"/>
-              </a:rPr>
-              <a:t>public record LibroResponseDTO(</a:t>
-            </a:r>
-            <a:endParaRPr lang="en-US" sz="1600" dirty="0"/>
-          </a:p>
-          <a:p>
-            <a:pPr marL="0" indent="0">
-              <a:buNone/>
-            </a:pPr>
-            <a:r>
-              <a:rPr lang="en-US" sz="1600" dirty="0">
-                <a:solidFill>
-                  <a:srgbClr val="263238"/>
-                </a:solidFill>
-                <a:latin typeface="Courier New" pitchFamily="34" charset="0"/>
-                <a:ea typeface="Courier New" pitchFamily="34" charset="-122"/>
-                <a:cs typeface="Courier New" pitchFamily="34" charset="-120"/>
-              </a:rPr>
-              <a:t>        Long id,</a:t>
-            </a:r>
-            <a:endParaRPr lang="en-US" sz="1600" dirty="0"/>
-          </a:p>
-          <a:p>
-            <a:pPr marL="0" indent="0">
-              <a:buNone/>
-            </a:pPr>
-            <a:r>
-              <a:rPr lang="en-US" sz="1600" dirty="0">
-                <a:solidFill>
-                  <a:srgbClr val="263238"/>
-                </a:solidFill>
-                <a:latin typeface="Courier New" pitchFamily="34" charset="0"/>
-                <a:ea typeface="Courier New" pitchFamily="34" charset="-122"/>
-                <a:cs typeface="Courier New" pitchFamily="34" charset="-120"/>
-              </a:rPr>
-              <a:t>        String titulo,</a:t>
-            </a:r>
-            <a:endParaRPr lang="en-US" sz="1600" dirty="0"/>
-          </a:p>
-          <a:p>
-            <a:pPr marL="0" indent="0">
-              <a:buNone/>
-            </a:pPr>
-            <a:r>
-              <a:rPr lang="en-US" sz="1600" dirty="0">
-                <a:solidFill>
-                  <a:srgbClr val="263238"/>
-                </a:solidFill>
-                <a:latin typeface="Courier New" pitchFamily="34" charset="0"/>
-                <a:ea typeface="Courier New" pitchFamily="34" charset="-122"/>
-                <a:cs typeface="Courier New" pitchFamily="34" charset="-120"/>
-              </a:rPr>
-              <a:t>        BigDecimal precio,</a:t>
-            </a:r>
-            <a:endParaRPr lang="en-US" sz="1600" dirty="0"/>
-          </a:p>
-          <a:p>
-            <a:pPr marL="0" indent="0">
-              <a:buNone/>
-            </a:pPr>
-            <a:r>
-              <a:rPr lang="en-US" sz="1600" dirty="0">
-                <a:solidFill>
-                  <a:srgbClr val="263238"/>
-                </a:solidFill>
-                <a:latin typeface="Courier New" pitchFamily="34" charset="0"/>
-                <a:ea typeface="Courier New" pitchFamily="34" charset="-122"/>
-                <a:cs typeface="Courier New" pitchFamily="34" charset="-120"/>
-              </a:rPr>
-              <a:t>        LocalDate fechaPublicacion,</a:t>
-            </a:r>
-            <a:endParaRPr lang="en-US" sz="1600" dirty="0"/>
-          </a:p>
-          <a:p>
-            <a:pPr marL="0" indent="0">
-              <a:buNone/>
-            </a:pPr>
-            <a:r>
-              <a:rPr lang="en-US" sz="1600" dirty="0">
-                <a:solidFill>
-                  <a:srgbClr val="263238"/>
-                </a:solidFill>
-                <a:latin typeface="Courier New" pitchFamily="34" charset="0"/>
-                <a:ea typeface="Courier New" pitchFamily="34" charset="-122"/>
-                <a:cs typeface="Courier New" pitchFamily="34" charset="-120"/>
-              </a:rPr>
-              <a:t>        EditorialDTO editorial</a:t>
-            </a:r>
-            <a:endParaRPr lang="en-US" sz="1600" dirty="0"/>
-          </a:p>
-          <a:p>
-            <a:pPr marL="0" indent="0">
-              <a:buNone/>
-            </a:pPr>
-            <a:r>
-              <a:rPr lang="en-US" sz="1600" dirty="0">
-                <a:solidFill>
-                  <a:srgbClr val="263238"/>
-                </a:solidFill>
-                <a:latin typeface="Courier New" pitchFamily="34" charset="0"/>
-                <a:ea typeface="Courier New" pitchFamily="34" charset="-122"/>
-                <a:cs typeface="Courier New" pitchFamily="34" charset="-120"/>
-              </a:rPr>
-              <a:t>) {}</a:t>
-            </a:r>
-            <a:endParaRPr lang="en-US" sz="1600" dirty="0"/>
-          </a:p>
-        </p:txBody>
-      </p:sp>
-      <p:sp>
-        <p:nvSpPr>
-          <p:cNvPr id="8" name="Text 6"/>
-          <p:cNvSpPr/>
-          <p:nvPr/>
-        </p:nvSpPr>
-        <p:spPr>
-          <a:xfrm>
-            <a:off x="548640" y="4709160"/>
-            <a:ext cx="11091672" cy="457200"/>
-          </a:xfrm>
-          <a:prstGeom prst="rect">
-            <a:avLst/>
-          </a:prstGeom>
-          <a:noFill/>
-          <a:ln/>
-        </p:spPr>
-        <p:txBody>
-          <a:bodyPr wrap="square" rtlCol="0" anchor="t"/>
-          <a:lstStyle/>
-          <a:p>
-            <a:pPr marL="0" indent="0">
-              <a:buNone/>
-            </a:pPr>
-            <a:r>
-              <a:rPr lang="en-US" sz="1800" dirty="0">
-                <a:solidFill>
-                  <a:srgbClr val="757575"/>
-                </a:solidFill>
-                <a:latin typeface="Arial" pitchFamily="34" charset="0"/>
-                <a:ea typeface="Arial" pitchFamily="34" charset="-122"/>
-                <a:cs typeface="Arial" pitchFamily="34" charset="-120"/>
-              </a:rPr>
-              <a:t>Ni rastro de coste, ni de los detalles internos de Hibernate — solo lo que quieres que vea un cliente.</a:t>
-            </a:r>
-            <a:endParaRPr lang="en-US" sz="1800" dirty="0"/>
           </a:p>
         </p:txBody>
       </p:sp>
@@ -9624,7 +9606,7 @@
 
 <file path=ppt/slides/slide20.xml><?xml version="1.0" encoding="utf-8"?>
 <p:sld xmlns:a="http://schemas.openxmlformats.org/drawingml/2006/main" xmlns:r="http://schemas.openxmlformats.org/officeDocument/2006/relationships" xmlns:p="http://schemas.openxmlformats.org/presentationml/2006/main">
-  <p:cSld name="Slide 20">
+  <p:cSld name="Slide 19">
     <p:spTree>
       <p:nvGrpSpPr>
         <p:cNvPr id="1" name=""/>
@@ -9704,6 +9686,408 @@
                 <a:ea typeface="Arial" pitchFamily="34" charset="-122"/>
                 <a:cs typeface="Arial" pitchFamily="34" charset="-120"/>
               </a:rPr>
+              <a:t>El DTO de salida</a:t>
+            </a:r>
+            <a:endParaRPr lang="en-US" sz="2600" dirty="0"/>
+          </a:p>
+        </p:txBody>
+      </p:sp>
+      <p:sp>
+        <p:nvSpPr>
+          <p:cNvPr id="4" name="Text 2"/>
+          <p:cNvSpPr/>
+          <p:nvPr/>
+        </p:nvSpPr>
+        <p:spPr>
+          <a:xfrm>
+            <a:off x="548640" y="6473952"/>
+            <a:ext cx="11091672" cy="292608"/>
+          </a:xfrm>
+          <a:prstGeom prst="rect">
+            <a:avLst/>
+          </a:prstGeom>
+          <a:noFill/>
+          <a:ln/>
+        </p:spPr>
+        <p:txBody>
+          <a:bodyPr wrap="square" rtlCol="0" anchor="ctr"/>
+          <a:lstStyle/>
+          <a:p>
+            <a:pPr marL="0" indent="0" algn="r">
+              <a:buNone/>
+            </a:pPr>
+            <a:r>
+              <a:rPr lang="en-US" sz="1100" dirty="0">
+                <a:solidFill>
+                  <a:srgbClr val="757575"/>
+                </a:solidFill>
+                <a:latin typeface="Arial" pitchFamily="34" charset="0"/>
+                <a:ea typeface="Arial" pitchFamily="34" charset="-122"/>
+                <a:cs typeface="Arial" pitchFamily="34" charset="-120"/>
+              </a:rPr>
+              <a:t>Acceso a Datos — Tema 1: CRUD y transacciones</a:t>
+            </a:r>
+            <a:endParaRPr lang="en-US" sz="1100" dirty="0"/>
+          </a:p>
+        </p:txBody>
+      </p:sp>
+      <p:sp>
+        <p:nvSpPr>
+          <p:cNvPr id="5" name="Shape 3"/>
+          <p:cNvSpPr/>
+          <p:nvPr/>
+        </p:nvSpPr>
+        <p:spPr>
+          <a:xfrm>
+            <a:off x="548640" y="1645920"/>
+            <a:ext cx="11091672" cy="2743200"/>
+          </a:xfrm>
+          <a:prstGeom prst="rect">
+            <a:avLst/>
+          </a:prstGeom>
+          <a:solidFill>
+            <a:srgbClr val="ECEFF1"/>
+          </a:solidFill>
+          <a:ln w="12700">
+            <a:solidFill>
+              <a:srgbClr val="EEEEEE"/>
+            </a:solidFill>
+            <a:prstDash val="solid"/>
+          </a:ln>
+        </p:spPr>
+        <p:txBody>
+          <a:bodyPr/>
+          <a:lstStyle/>
+          <a:p>
+            <a:endParaRPr lang="es-ES"/>
+          </a:p>
+        </p:txBody>
+      </p:sp>
+      <p:sp>
+        <p:nvSpPr>
+          <p:cNvPr id="6" name="Shape 4"/>
+          <p:cNvSpPr/>
+          <p:nvPr/>
+        </p:nvSpPr>
+        <p:spPr>
+          <a:xfrm>
+            <a:off x="548640" y="1645920"/>
+            <a:ext cx="73152" cy="2743200"/>
+          </a:xfrm>
+          <a:prstGeom prst="rect">
+            <a:avLst/>
+          </a:prstGeom>
+          <a:solidFill>
+            <a:srgbClr val="E64A19"/>
+          </a:solidFill>
+          <a:ln w="12700">
+            <a:solidFill>
+              <a:srgbClr val="E64A19"/>
+            </a:solidFill>
+            <a:prstDash val="solid"/>
+          </a:ln>
+        </p:spPr>
+        <p:txBody>
+          <a:bodyPr/>
+          <a:lstStyle/>
+          <a:p>
+            <a:endParaRPr lang="es-ES"/>
+          </a:p>
+        </p:txBody>
+      </p:sp>
+      <p:sp>
+        <p:nvSpPr>
+          <p:cNvPr id="7" name="Text 5"/>
+          <p:cNvSpPr/>
+          <p:nvPr/>
+        </p:nvSpPr>
+        <p:spPr>
+          <a:xfrm>
+            <a:off x="822960" y="1755648"/>
+            <a:ext cx="10588752" cy="2523744"/>
+          </a:xfrm>
+          <a:prstGeom prst="rect">
+            <a:avLst/>
+          </a:prstGeom>
+          <a:noFill/>
+          <a:ln/>
+        </p:spPr>
+        <p:txBody>
+          <a:bodyPr wrap="square" rtlCol="0" anchor="t"/>
+          <a:lstStyle/>
+          <a:p>
+            <a:pPr marL="0" indent="0">
+              <a:buNone/>
+            </a:pPr>
+            <a:r>
+              <a:rPr lang="en-US" sz="1600" dirty="0">
+                <a:solidFill>
+                  <a:srgbClr val="263238"/>
+                </a:solidFill>
+                <a:latin typeface="Courier New" pitchFamily="34" charset="0"/>
+                <a:ea typeface="Courier New" pitchFamily="34" charset="-122"/>
+                <a:cs typeface="Courier New" pitchFamily="34" charset="-120"/>
+              </a:rPr>
+              <a:t>public record EditorialDTO(Long id, String nombre) {}</a:t>
+            </a:r>
+            <a:endParaRPr lang="en-US" sz="1600" dirty="0"/>
+          </a:p>
+          <a:p>
+            <a:pPr marL="0" indent="0">
+              <a:buNone/>
+            </a:pPr>
+            <a:endParaRPr lang="en-US" sz="1600" dirty="0"/>
+          </a:p>
+          <a:p>
+            <a:pPr marL="0" indent="0">
+              <a:buNone/>
+            </a:pPr>
+            <a:r>
+              <a:rPr lang="en-US" sz="1600" dirty="0">
+                <a:solidFill>
+                  <a:srgbClr val="263238"/>
+                </a:solidFill>
+                <a:latin typeface="Courier New" pitchFamily="34" charset="0"/>
+                <a:ea typeface="Courier New" pitchFamily="34" charset="-122"/>
+                <a:cs typeface="Courier New" pitchFamily="34" charset="-120"/>
+              </a:rPr>
+              <a:t>public record LibroResponseDTO(</a:t>
+            </a:r>
+            <a:endParaRPr lang="en-US" sz="1600" dirty="0"/>
+          </a:p>
+          <a:p>
+            <a:pPr marL="0" indent="0">
+              <a:buNone/>
+            </a:pPr>
+            <a:r>
+              <a:rPr lang="en-US" sz="1600" dirty="0">
+                <a:solidFill>
+                  <a:srgbClr val="263238"/>
+                </a:solidFill>
+                <a:latin typeface="Courier New" pitchFamily="34" charset="0"/>
+                <a:ea typeface="Courier New" pitchFamily="34" charset="-122"/>
+                <a:cs typeface="Courier New" pitchFamily="34" charset="-120"/>
+              </a:rPr>
+              <a:t>        Long id,</a:t>
+            </a:r>
+            <a:endParaRPr lang="en-US" sz="1600" dirty="0"/>
+          </a:p>
+          <a:p>
+            <a:pPr marL="0" indent="0">
+              <a:buNone/>
+            </a:pPr>
+            <a:r>
+              <a:rPr lang="en-US" sz="1600" dirty="0">
+                <a:solidFill>
+                  <a:srgbClr val="263238"/>
+                </a:solidFill>
+                <a:latin typeface="Courier New" pitchFamily="34" charset="0"/>
+                <a:ea typeface="Courier New" pitchFamily="34" charset="-122"/>
+                <a:cs typeface="Courier New" pitchFamily="34" charset="-120"/>
+              </a:rPr>
+              <a:t>        String titulo,</a:t>
+            </a:r>
+            <a:endParaRPr lang="en-US" sz="1600" dirty="0"/>
+          </a:p>
+          <a:p>
+            <a:pPr marL="0" indent="0">
+              <a:buNone/>
+            </a:pPr>
+            <a:r>
+              <a:rPr lang="en-US" sz="1600" dirty="0">
+                <a:solidFill>
+                  <a:srgbClr val="263238"/>
+                </a:solidFill>
+                <a:latin typeface="Courier New" pitchFamily="34" charset="0"/>
+                <a:ea typeface="Courier New" pitchFamily="34" charset="-122"/>
+                <a:cs typeface="Courier New" pitchFamily="34" charset="-120"/>
+              </a:rPr>
+              <a:t>        BigDecimal precio,</a:t>
+            </a:r>
+            <a:endParaRPr lang="en-US" sz="1600" dirty="0"/>
+          </a:p>
+          <a:p>
+            <a:pPr marL="0" indent="0">
+              <a:buNone/>
+            </a:pPr>
+            <a:r>
+              <a:rPr lang="en-US" sz="1600" dirty="0">
+                <a:solidFill>
+                  <a:srgbClr val="263238"/>
+                </a:solidFill>
+                <a:latin typeface="Courier New" pitchFamily="34" charset="0"/>
+                <a:ea typeface="Courier New" pitchFamily="34" charset="-122"/>
+                <a:cs typeface="Courier New" pitchFamily="34" charset="-120"/>
+              </a:rPr>
+              <a:t>        LocalDate fechaPublicacion,</a:t>
+            </a:r>
+            <a:endParaRPr lang="en-US" sz="1600" dirty="0"/>
+          </a:p>
+          <a:p>
+            <a:pPr marL="0" indent="0">
+              <a:buNone/>
+            </a:pPr>
+            <a:r>
+              <a:rPr lang="en-US" sz="1600" dirty="0">
+                <a:solidFill>
+                  <a:srgbClr val="263238"/>
+                </a:solidFill>
+                <a:latin typeface="Courier New" pitchFamily="34" charset="0"/>
+                <a:ea typeface="Courier New" pitchFamily="34" charset="-122"/>
+                <a:cs typeface="Courier New" pitchFamily="34" charset="-120"/>
+              </a:rPr>
+              <a:t>        EditorialDTO editorial</a:t>
+            </a:r>
+            <a:endParaRPr lang="en-US" sz="1600" dirty="0"/>
+          </a:p>
+          <a:p>
+            <a:pPr marL="0" indent="0">
+              <a:buNone/>
+            </a:pPr>
+            <a:r>
+              <a:rPr lang="en-US" sz="1600" dirty="0">
+                <a:solidFill>
+                  <a:srgbClr val="263238"/>
+                </a:solidFill>
+                <a:latin typeface="Courier New" pitchFamily="34" charset="0"/>
+                <a:ea typeface="Courier New" pitchFamily="34" charset="-122"/>
+                <a:cs typeface="Courier New" pitchFamily="34" charset="-120"/>
+              </a:rPr>
+              <a:t>) {}</a:t>
+            </a:r>
+            <a:endParaRPr lang="en-US" sz="1600" dirty="0"/>
+          </a:p>
+        </p:txBody>
+      </p:sp>
+      <p:sp>
+        <p:nvSpPr>
+          <p:cNvPr id="8" name="Text 6"/>
+          <p:cNvSpPr/>
+          <p:nvPr/>
+        </p:nvSpPr>
+        <p:spPr>
+          <a:xfrm>
+            <a:off x="548640" y="4709160"/>
+            <a:ext cx="11091672" cy="457200"/>
+          </a:xfrm>
+          <a:prstGeom prst="rect">
+            <a:avLst/>
+          </a:prstGeom>
+          <a:noFill/>
+          <a:ln/>
+        </p:spPr>
+        <p:txBody>
+          <a:bodyPr wrap="square" rtlCol="0" anchor="t"/>
+          <a:lstStyle/>
+          <a:p>
+            <a:pPr marL="0" indent="0">
+              <a:buNone/>
+            </a:pPr>
+            <a:r>
+              <a:rPr lang="en-US" sz="1800" dirty="0">
+                <a:solidFill>
+                  <a:srgbClr val="757575"/>
+                </a:solidFill>
+                <a:latin typeface="Arial" pitchFamily="34" charset="0"/>
+                <a:ea typeface="Arial" pitchFamily="34" charset="-122"/>
+                <a:cs typeface="Arial" pitchFamily="34" charset="-120"/>
+              </a:rPr>
+              <a:t>Ni rastro de coste, ni de los detalles internos de Hibernate — solo lo que quieres que vea un cliente.</a:t>
+            </a:r>
+            <a:endParaRPr lang="en-US" sz="1800" dirty="0"/>
+          </a:p>
+        </p:txBody>
+      </p:sp>
+    </p:spTree>
+  </p:cSld>
+  <p:clrMapOvr>
+    <a:masterClrMapping/>
+  </p:clrMapOvr>
+</p:sld>
+</file>
+
+<file path=ppt/slides/slide21.xml><?xml version="1.0" encoding="utf-8"?>
+<p:sld xmlns:a="http://schemas.openxmlformats.org/drawingml/2006/main" xmlns:r="http://schemas.openxmlformats.org/officeDocument/2006/relationships" xmlns:p="http://schemas.openxmlformats.org/presentationml/2006/main">
+  <p:cSld name="Slide 20">
+    <p:spTree>
+      <p:nvGrpSpPr>
+        <p:cNvPr id="1" name=""/>
+        <p:cNvGrpSpPr/>
+        <p:nvPr/>
+      </p:nvGrpSpPr>
+      <p:grpSpPr>
+        <a:xfrm>
+          <a:off x="0" y="0"/>
+          <a:ext cx="0" cy="0"/>
+          <a:chOff x="0" y="0"/>
+          <a:chExt cx="0" cy="0"/>
+        </a:xfrm>
+      </p:grpSpPr>
+      <p:sp>
+        <p:nvSpPr>
+          <p:cNvPr id="2" name="Shape 0"/>
+          <p:cNvSpPr/>
+          <p:nvPr/>
+        </p:nvSpPr>
+        <p:spPr>
+          <a:xfrm>
+            <a:off x="0" y="0"/>
+            <a:ext cx="12188952" cy="777240"/>
+          </a:xfrm>
+          <a:prstGeom prst="rect">
+            <a:avLst/>
+          </a:prstGeom>
+          <a:solidFill>
+            <a:srgbClr val="7F0000"/>
+          </a:solidFill>
+          <a:ln w="12700">
+            <a:solidFill>
+              <a:srgbClr val="7F0000"/>
+            </a:solidFill>
+            <a:prstDash val="solid"/>
+          </a:ln>
+        </p:spPr>
+        <p:txBody>
+          <a:bodyPr/>
+          <a:lstStyle/>
+          <a:p>
+            <a:endParaRPr lang="es-ES"/>
+          </a:p>
+        </p:txBody>
+      </p:sp>
+      <p:sp>
+        <p:nvSpPr>
+          <p:cNvPr id="3" name="Text 1"/>
+          <p:cNvSpPr/>
+          <p:nvPr/>
+        </p:nvSpPr>
+        <p:spPr>
+          <a:xfrm>
+            <a:off x="365760" y="0"/>
+            <a:ext cx="11457432" cy="777240"/>
+          </a:xfrm>
+          <a:prstGeom prst="rect">
+            <a:avLst/>
+          </a:prstGeom>
+          <a:noFill/>
+          <a:ln/>
+        </p:spPr>
+        <p:txBody>
+          <a:bodyPr wrap="square" rtlCol="0" anchor="ctr"/>
+          <a:lstStyle/>
+          <a:p>
+            <a:pPr marL="0" indent="0">
+              <a:buNone/>
+            </a:pPr>
+            <a:r>
+              <a:rPr lang="en-US" sz="2600" b="1" dirty="0">
+                <a:solidFill>
+                  <a:srgbClr val="FFFFFF"/>
+                </a:solidFill>
+                <a:latin typeface="Arial" pitchFamily="34" charset="0"/>
+                <a:ea typeface="Arial" pitchFamily="34" charset="-122"/>
+                <a:cs typeface="Arial" pitchFamily="34" charset="-120"/>
+              </a:rPr>
               <a:t>findById traduce con mapToDTO</a:t>
             </a:r>
             <a:endParaRPr lang="en-US" sz="2600" dirty="0"/>
@@ -10053,7 +10437,7 @@
 </p:sld>
 </file>
 
-<file path=ppt/slides/slide21.xml><?xml version="1.0" encoding="utf-8"?>
+<file path=ppt/slides/slide22.xml><?xml version="1.0" encoding="utf-8"?>
 <p:sld xmlns:a="http://schemas.openxmlformats.org/drawingml/2006/main" xmlns:r="http://schemas.openxmlformats.org/officeDocument/2006/relationships" xmlns:p="http://schemas.openxmlformats.org/presentationml/2006/main">
   <p:cSld name="Slide 21">
     <p:spTree>
@@ -11270,7 +11654,7 @@
 </p:sld>
 </file>
 
-<file path=ppt/slides/slide22.xml><?xml version="1.0" encoding="utf-8"?>
+<file path=ppt/slides/slide23.xml><?xml version="1.0" encoding="utf-8"?>
 <p:sld xmlns:a="http://schemas.openxmlformats.org/drawingml/2006/main" xmlns:r="http://schemas.openxmlformats.org/officeDocument/2006/relationships" xmlns:p="http://schemas.openxmlformats.org/presentationml/2006/main">
   <p:cSld name="Slide 22">
     <p:spTree>
@@ -11598,7 +11982,7 @@
 </p:sld>
 </file>
 
-<file path=ppt/slides/slide23.xml><?xml version="1.0" encoding="utf-8"?>
+<file path=ppt/slides/slide24.xml><?xml version="1.0" encoding="utf-8"?>
 <p:sld xmlns:a="http://schemas.openxmlformats.org/drawingml/2006/main" xmlns:r="http://schemas.openxmlformats.org/officeDocument/2006/relationships" xmlns:p="http://schemas.openxmlformats.org/presentationml/2006/main">
   <p:cSld name="Slide 23">
     <p:spTree>
@@ -12148,7 +12532,7 @@
 </p:sld>
 </file>
 
-<file path=ppt/slides/slide24.xml><?xml version="1.0" encoding="utf-8"?>
+<file path=ppt/slides/slide25.xml><?xml version="1.0" encoding="utf-8"?>
 <p:sld xmlns:a="http://schemas.openxmlformats.org/drawingml/2006/main" xmlns:r="http://schemas.openxmlformats.org/officeDocument/2006/relationships" xmlns:p="http://schemas.openxmlformats.org/presentationml/2006/main">
   <p:cSld name="Slide 24">
     <p:spTree>
@@ -12393,7 +12777,7 @@
 </p:sld>
 </file>
 
-<file path=ppt/slides/slide25.xml><?xml version="1.0" encoding="utf-8"?>
+<file path=ppt/slides/slide26.xml><?xml version="1.0" encoding="utf-8"?>
 <p:sld xmlns:a="http://schemas.openxmlformats.org/drawingml/2006/main" xmlns:r="http://schemas.openxmlformats.org/officeDocument/2006/relationships" xmlns:p="http://schemas.openxmlformats.org/presentationml/2006/main">
   <p:cSld name="Slide 25">
     <p:spTree>
@@ -12716,7 +13100,7 @@
 </p:sld>
 </file>
 
-<file path=ppt/slides/slide26.xml><?xml version="1.0" encoding="utf-8"?>
+<file path=ppt/slides/slide27.xml><?xml version="1.0" encoding="utf-8"?>
 <p:sld xmlns:a="http://schemas.openxmlformats.org/drawingml/2006/main" xmlns:r="http://schemas.openxmlformats.org/officeDocument/2006/relationships" xmlns:p="http://schemas.openxmlformats.org/presentationml/2006/main">
   <p:cSld name="Slide 26">
     <p:spTree>
@@ -14377,7 +14761,7 @@
 </p:sld>
 </file>
 
-<file path=ppt/slides/slide27.xml><?xml version="1.0" encoding="utf-8"?>
+<file path=ppt/slides/slide28.xml><?xml version="1.0" encoding="utf-8"?>
 <p:sld xmlns:a="http://schemas.openxmlformats.org/drawingml/2006/main" xmlns:r="http://schemas.openxmlformats.org/officeDocument/2006/relationships" xmlns:p="http://schemas.openxmlformats.org/presentationml/2006/main">
   <p:cSld name="Slide 27">
     <p:spTree>
@@ -15866,7 +16250,7 @@
 </p:sld>
 </file>
 
-<file path=ppt/slides/slide28.xml><?xml version="1.0" encoding="utf-8"?>
+<file path=ppt/slides/slide29.xml><?xml version="1.0" encoding="utf-8"?>
 <p:sld xmlns:a="http://schemas.openxmlformats.org/drawingml/2006/main" xmlns:r="http://schemas.openxmlformats.org/officeDocument/2006/relationships" xmlns:p="http://schemas.openxmlformats.org/presentationml/2006/main">
   <p:cSld name="Slide 28">
     <p:spTree>
@@ -16215,470 +16599,6 @@
               <a:t>@RequestBody convierte el JSON en un LibroCreateDTO; @Valid activa de verdad las comprobaciones. Si algún campo incumple su restricción, Spring rechaza la petición con un 400 Bad Request antes de que tu código llegue a ejecutarse.</a:t>
             </a:r>
             <a:endParaRPr lang="en-US" sz="2000" dirty="0"/>
-          </a:p>
-        </p:txBody>
-      </p:sp>
-    </p:spTree>
-  </p:cSld>
-  <p:clrMapOvr>
-    <a:masterClrMapping/>
-  </p:clrMapOvr>
-</p:sld>
-</file>
-
-<file path=ppt/slides/slide29.xml><?xml version="1.0" encoding="utf-8"?>
-<p:sld xmlns:a="http://schemas.openxmlformats.org/drawingml/2006/main" xmlns:r="http://schemas.openxmlformats.org/officeDocument/2006/relationships" xmlns:p="http://schemas.openxmlformats.org/presentationml/2006/main">
-  <p:cSld name="Slide 29">
-    <p:spTree>
-      <p:nvGrpSpPr>
-        <p:cNvPr id="1" name=""/>
-        <p:cNvGrpSpPr/>
-        <p:nvPr/>
-      </p:nvGrpSpPr>
-      <p:grpSpPr>
-        <a:xfrm>
-          <a:off x="0" y="0"/>
-          <a:ext cx="0" cy="0"/>
-          <a:chOff x="0" y="0"/>
-          <a:chExt cx="0" cy="0"/>
-        </a:xfrm>
-      </p:grpSpPr>
-      <p:sp>
-        <p:nvSpPr>
-          <p:cNvPr id="2" name="Shape 0"/>
-          <p:cNvSpPr/>
-          <p:nvPr/>
-        </p:nvSpPr>
-        <p:spPr>
-          <a:xfrm>
-            <a:off x="0" y="0"/>
-            <a:ext cx="12188952" cy="777240"/>
-          </a:xfrm>
-          <a:prstGeom prst="rect">
-            <a:avLst/>
-          </a:prstGeom>
-          <a:solidFill>
-            <a:srgbClr val="7F0000"/>
-          </a:solidFill>
-          <a:ln w="12700">
-            <a:solidFill>
-              <a:srgbClr val="7F0000"/>
-            </a:solidFill>
-            <a:prstDash val="solid"/>
-          </a:ln>
-        </p:spPr>
-        <p:txBody>
-          <a:bodyPr/>
-          <a:lstStyle/>
-          <a:p>
-            <a:endParaRPr lang="es-ES"/>
-          </a:p>
-        </p:txBody>
-      </p:sp>
-      <p:sp>
-        <p:nvSpPr>
-          <p:cNvPr id="3" name="Text 1"/>
-          <p:cNvSpPr/>
-          <p:nvPr/>
-        </p:nvSpPr>
-        <p:spPr>
-          <a:xfrm>
-            <a:off x="365760" y="0"/>
-            <a:ext cx="11457432" cy="777240"/>
-          </a:xfrm>
-          <a:prstGeom prst="rect">
-            <a:avLst/>
-          </a:prstGeom>
-          <a:noFill/>
-          <a:ln/>
-        </p:spPr>
-        <p:txBody>
-          <a:bodyPr wrap="square" rtlCol="0" anchor="ctr"/>
-          <a:lstStyle/>
-          <a:p>
-            <a:pPr marL="0" indent="0">
-              <a:buNone/>
-            </a:pPr>
-            <a:r>
-              <a:rPr lang="en-US" sz="2600" b="1" dirty="0">
-                <a:solidFill>
-                  <a:srgbClr val="FFFFFF"/>
-                </a:solidFill>
-                <a:latin typeface="Arial" pitchFamily="34" charset="0"/>
-                <a:ea typeface="Arial" pitchFamily="34" charset="-122"/>
-                <a:cs typeface="Arial" pitchFamily="34" charset="-120"/>
-              </a:rPr>
-              <a:t>update() y delete(): el recurso que no existe</a:t>
-            </a:r>
-            <a:endParaRPr lang="en-US" sz="2600" dirty="0"/>
-          </a:p>
-        </p:txBody>
-      </p:sp>
-      <p:sp>
-        <p:nvSpPr>
-          <p:cNvPr id="4" name="Text 2"/>
-          <p:cNvSpPr/>
-          <p:nvPr/>
-        </p:nvSpPr>
-        <p:spPr>
-          <a:xfrm>
-            <a:off x="548640" y="6473952"/>
-            <a:ext cx="11091672" cy="292608"/>
-          </a:xfrm>
-          <a:prstGeom prst="rect">
-            <a:avLst/>
-          </a:prstGeom>
-          <a:noFill/>
-          <a:ln/>
-        </p:spPr>
-        <p:txBody>
-          <a:bodyPr wrap="square" rtlCol="0" anchor="ctr"/>
-          <a:lstStyle/>
-          <a:p>
-            <a:pPr marL="0" indent="0" algn="r">
-              <a:buNone/>
-            </a:pPr>
-            <a:r>
-              <a:rPr lang="en-US" sz="1100" dirty="0">
-                <a:solidFill>
-                  <a:srgbClr val="757575"/>
-                </a:solidFill>
-                <a:latin typeface="Arial" pitchFamily="34" charset="0"/>
-                <a:ea typeface="Arial" pitchFamily="34" charset="-122"/>
-                <a:cs typeface="Arial" pitchFamily="34" charset="-120"/>
-              </a:rPr>
-              <a:t>Acceso a Datos — Tema 1: CRUD y transacciones</a:t>
-            </a:r>
-            <a:endParaRPr lang="en-US" sz="1100" dirty="0"/>
-          </a:p>
-        </p:txBody>
-      </p:sp>
-      <p:sp>
-        <p:nvSpPr>
-          <p:cNvPr id="5" name="Text 3"/>
-          <p:cNvSpPr/>
-          <p:nvPr/>
-        </p:nvSpPr>
-        <p:spPr>
-          <a:xfrm>
-            <a:off x="548640" y="1417320"/>
-            <a:ext cx="11091672" cy="502920"/>
-          </a:xfrm>
-          <a:prstGeom prst="rect">
-            <a:avLst/>
-          </a:prstGeom>
-          <a:noFill/>
-          <a:ln/>
-        </p:spPr>
-        <p:txBody>
-          <a:bodyPr wrap="square" rtlCol="0" anchor="t"/>
-          <a:lstStyle/>
-          <a:p>
-            <a:pPr marL="0" indent="0">
-              <a:buNone/>
-            </a:pPr>
-            <a:r>
-              <a:rPr lang="en-US" sz="1900" dirty="0">
-                <a:solidFill>
-                  <a:srgbClr val="212121"/>
-                </a:solidFill>
-                <a:latin typeface="Arial" pitchFamily="34" charset="0"/>
-                <a:ea typeface="Arial" pitchFamily="34" charset="-122"/>
-                <a:cs typeface="Arial" pitchFamily="34" charset="-120"/>
-              </a:rPr>
-              <a:t>update() reutiliza LibroCreateDTO y sigue un patrón parecido, con un matiz: primero tiene que cargar el libro que ya existe.</a:t>
-            </a:r>
-            <a:endParaRPr lang="en-US" sz="1900" dirty="0"/>
-          </a:p>
-        </p:txBody>
-      </p:sp>
-      <p:sp>
-        <p:nvSpPr>
-          <p:cNvPr id="6" name="Shape 4"/>
-          <p:cNvSpPr/>
-          <p:nvPr/>
-        </p:nvSpPr>
-        <p:spPr>
-          <a:xfrm>
-            <a:off x="548640" y="2194560"/>
-            <a:ext cx="11091672" cy="3383280"/>
-          </a:xfrm>
-          <a:prstGeom prst="rect">
-            <a:avLst/>
-          </a:prstGeom>
-          <a:solidFill>
-            <a:srgbClr val="ECEFF1"/>
-          </a:solidFill>
-          <a:ln w="12700">
-            <a:solidFill>
-              <a:srgbClr val="EEEEEE"/>
-            </a:solidFill>
-            <a:prstDash val="solid"/>
-          </a:ln>
-        </p:spPr>
-        <p:txBody>
-          <a:bodyPr/>
-          <a:lstStyle/>
-          <a:p>
-            <a:endParaRPr lang="es-ES"/>
-          </a:p>
-        </p:txBody>
-      </p:sp>
-      <p:sp>
-        <p:nvSpPr>
-          <p:cNvPr id="7" name="Shape 5"/>
-          <p:cNvSpPr/>
-          <p:nvPr/>
-        </p:nvSpPr>
-        <p:spPr>
-          <a:xfrm>
-            <a:off x="548640" y="2194560"/>
-            <a:ext cx="73152" cy="3383280"/>
-          </a:xfrm>
-          <a:prstGeom prst="rect">
-            <a:avLst/>
-          </a:prstGeom>
-          <a:solidFill>
-            <a:srgbClr val="E64A19"/>
-          </a:solidFill>
-          <a:ln w="12700">
-            <a:solidFill>
-              <a:srgbClr val="E64A19"/>
-            </a:solidFill>
-            <a:prstDash val="solid"/>
-          </a:ln>
-        </p:spPr>
-        <p:txBody>
-          <a:bodyPr/>
-          <a:lstStyle/>
-          <a:p>
-            <a:endParaRPr lang="es-ES"/>
-          </a:p>
-        </p:txBody>
-      </p:sp>
-      <p:sp>
-        <p:nvSpPr>
-          <p:cNvPr id="8" name="Text 6"/>
-          <p:cNvSpPr/>
-          <p:nvPr/>
-        </p:nvSpPr>
-        <p:spPr>
-          <a:xfrm>
-            <a:off x="822960" y="2304288"/>
-            <a:ext cx="10588752" cy="3163824"/>
-          </a:xfrm>
-          <a:prstGeom prst="rect">
-            <a:avLst/>
-          </a:prstGeom>
-          <a:noFill/>
-          <a:ln/>
-        </p:spPr>
-        <p:txBody>
-          <a:bodyPr wrap="square" rtlCol="0" anchor="t"/>
-          <a:lstStyle/>
-          <a:p>
-            <a:pPr marL="0" indent="0">
-              <a:buNone/>
-            </a:pPr>
-            <a:r>
-              <a:rPr lang="en-US" sz="1300" dirty="0">
-                <a:solidFill>
-                  <a:srgbClr val="263238"/>
-                </a:solidFill>
-                <a:latin typeface="Courier New" pitchFamily="34" charset="0"/>
-                <a:ea typeface="Courier New" pitchFamily="34" charset="-122"/>
-                <a:cs typeface="Courier New" pitchFamily="34" charset="-120"/>
-              </a:rPr>
-              <a:t>@Transactional</a:t>
-            </a:r>
-            <a:endParaRPr lang="en-US" sz="1300" dirty="0"/>
-          </a:p>
-          <a:p>
-            <a:pPr marL="0" indent="0">
-              <a:buNone/>
-            </a:pPr>
-            <a:r>
-              <a:rPr lang="en-US" sz="1300" dirty="0">
-                <a:solidFill>
-                  <a:srgbClr val="263238"/>
-                </a:solidFill>
-                <a:latin typeface="Courier New" pitchFamily="34" charset="0"/>
-                <a:ea typeface="Courier New" pitchFamily="34" charset="-122"/>
-                <a:cs typeface="Courier New" pitchFamily="34" charset="-120"/>
-              </a:rPr>
-              <a:t>public LibroResponseDTO update(Long id, LibroCreateDTO dto) {</a:t>
-            </a:r>
-            <a:endParaRPr lang="en-US" sz="1300" dirty="0"/>
-          </a:p>
-          <a:p>
-            <a:pPr marL="0" indent="0">
-              <a:buNone/>
-            </a:pPr>
-            <a:r>
-              <a:rPr lang="en-US" sz="1300" dirty="0">
-                <a:solidFill>
-                  <a:srgbClr val="263238"/>
-                </a:solidFill>
-                <a:latin typeface="Courier New" pitchFamily="34" charset="0"/>
-                <a:ea typeface="Courier New" pitchFamily="34" charset="-122"/>
-                <a:cs typeface="Courier New" pitchFamily="34" charset="-120"/>
-              </a:rPr>
-              <a:t>    Libro libro = libroRepository.findById(id)</a:t>
-            </a:r>
-            <a:endParaRPr lang="en-US" sz="1300" dirty="0"/>
-          </a:p>
-          <a:p>
-            <a:pPr marL="0" indent="0">
-              <a:buNone/>
-            </a:pPr>
-            <a:r>
-              <a:rPr lang="en-US" sz="1300" dirty="0">
-                <a:solidFill>
-                  <a:srgbClr val="263238"/>
-                </a:solidFill>
-                <a:latin typeface="Courier New" pitchFamily="34" charset="0"/>
-                <a:ea typeface="Courier New" pitchFamily="34" charset="-122"/>
-                <a:cs typeface="Courier New" pitchFamily="34" charset="-120"/>
-              </a:rPr>
-              <a:t>            .orElseThrow(() -&gt; new ResponseStatusException(HttpStatus.NOT_FOUND, "Libro no encontrado"));</a:t>
-            </a:r>
-            <a:endParaRPr lang="en-US" sz="1300" dirty="0"/>
-          </a:p>
-          <a:p>
-            <a:pPr marL="0" indent="0">
-              <a:buNone/>
-            </a:pPr>
-            <a:r>
-              <a:rPr lang="en-US" sz="1300" dirty="0">
-                <a:solidFill>
-                  <a:srgbClr val="263238"/>
-                </a:solidFill>
-                <a:latin typeface="Courier New" pitchFamily="34" charset="0"/>
-                <a:ea typeface="Courier New" pitchFamily="34" charset="-122"/>
-                <a:cs typeface="Courier New" pitchFamily="34" charset="-120"/>
-              </a:rPr>
-              <a:t>    Editorial editorial = editorialRepository.findById(dto.editorialId())</a:t>
-            </a:r>
-            <a:endParaRPr lang="en-US" sz="1300" dirty="0"/>
-          </a:p>
-          <a:p>
-            <a:pPr marL="0" indent="0">
-              <a:buNone/>
-            </a:pPr>
-            <a:r>
-              <a:rPr lang="en-US" sz="1300" dirty="0">
-                <a:solidFill>
-                  <a:srgbClr val="263238"/>
-                </a:solidFill>
-                <a:latin typeface="Courier New" pitchFamily="34" charset="0"/>
-                <a:ea typeface="Courier New" pitchFamily="34" charset="-122"/>
-                <a:cs typeface="Courier New" pitchFamily="34" charset="-120"/>
-              </a:rPr>
-              <a:t>            .orElseThrow(() -&gt; new ResponseStatusException(HttpStatus.NOT_FOUND, "Editorial no encontrada"));</a:t>
-            </a:r>
-            <a:endParaRPr lang="en-US" sz="1300" dirty="0"/>
-          </a:p>
-          <a:p>
-            <a:pPr marL="0" indent="0">
-              <a:buNone/>
-            </a:pPr>
-            <a:r>
-              <a:rPr lang="en-US" sz="1300" dirty="0">
-                <a:solidFill>
-                  <a:srgbClr val="263238"/>
-                </a:solidFill>
-                <a:latin typeface="Courier New" pitchFamily="34" charset="0"/>
-                <a:ea typeface="Courier New" pitchFamily="34" charset="-122"/>
-                <a:cs typeface="Courier New" pitchFamily="34" charset="-120"/>
-              </a:rPr>
-              <a:t>    libro.setTitulo(dto.titulo());</a:t>
-            </a:r>
-            <a:endParaRPr lang="en-US" sz="1300" dirty="0"/>
-          </a:p>
-          <a:p>
-            <a:pPr marL="0" indent="0">
-              <a:buNone/>
-            </a:pPr>
-            <a:r>
-              <a:rPr lang="en-US" sz="1300" dirty="0">
-                <a:solidFill>
-                  <a:srgbClr val="263238"/>
-                </a:solidFill>
-                <a:latin typeface="Courier New" pitchFamily="34" charset="0"/>
-                <a:ea typeface="Courier New" pitchFamily="34" charset="-122"/>
-                <a:cs typeface="Courier New" pitchFamily="34" charset="-120"/>
-              </a:rPr>
-              <a:t>    libro.setPrecio(dto.precio());</a:t>
-            </a:r>
-            <a:endParaRPr lang="en-US" sz="1300" dirty="0"/>
-          </a:p>
-          <a:p>
-            <a:pPr marL="0" indent="0">
-              <a:buNone/>
-            </a:pPr>
-            <a:r>
-              <a:rPr lang="en-US" sz="1300" dirty="0">
-                <a:solidFill>
-                  <a:srgbClr val="263238"/>
-                </a:solidFill>
-                <a:latin typeface="Courier New" pitchFamily="34" charset="0"/>
-                <a:ea typeface="Courier New" pitchFamily="34" charset="-122"/>
-                <a:cs typeface="Courier New" pitchFamily="34" charset="-120"/>
-              </a:rPr>
-              <a:t>    libro.setFechaPublicacion(dto.fechaPublicacion());</a:t>
-            </a:r>
-            <a:endParaRPr lang="en-US" sz="1300" dirty="0"/>
-          </a:p>
-          <a:p>
-            <a:pPr marL="0" indent="0">
-              <a:buNone/>
-            </a:pPr>
-            <a:r>
-              <a:rPr lang="en-US" sz="1300" dirty="0">
-                <a:solidFill>
-                  <a:srgbClr val="263238"/>
-                </a:solidFill>
-                <a:latin typeface="Courier New" pitchFamily="34" charset="0"/>
-                <a:ea typeface="Courier New" pitchFamily="34" charset="-122"/>
-                <a:cs typeface="Courier New" pitchFamily="34" charset="-120"/>
-              </a:rPr>
-              <a:t>    libro.setEditorial(editorial);</a:t>
-            </a:r>
-            <a:endParaRPr lang="en-US" sz="1300" dirty="0"/>
-          </a:p>
-          <a:p>
-            <a:pPr marL="0" indent="0">
-              <a:buNone/>
-            </a:pPr>
-            <a:r>
-              <a:rPr lang="en-US" sz="1300" dirty="0">
-                <a:solidFill>
-                  <a:srgbClr val="263238"/>
-                </a:solidFill>
-                <a:latin typeface="Courier New" pitchFamily="34" charset="0"/>
-                <a:ea typeface="Courier New" pitchFamily="34" charset="-122"/>
-                <a:cs typeface="Courier New" pitchFamily="34" charset="-120"/>
-              </a:rPr>
-              <a:t>    return mapToDTO(libroRepository.save(libro));</a:t>
-            </a:r>
-            <a:endParaRPr lang="en-US" sz="1300" dirty="0"/>
-          </a:p>
-          <a:p>
-            <a:pPr marL="0" indent="0">
-              <a:buNone/>
-            </a:pPr>
-            <a:r>
-              <a:rPr lang="en-US" sz="1300" dirty="0">
-                <a:solidFill>
-                  <a:srgbClr val="263238"/>
-                </a:solidFill>
-                <a:latin typeface="Courier New" pitchFamily="34" charset="0"/>
-                <a:ea typeface="Courier New" pitchFamily="34" charset="-122"/>
-                <a:cs typeface="Courier New" pitchFamily="34" charset="-120"/>
-              </a:rPr>
-              <a:t>}</a:t>
-            </a:r>
-            <a:endParaRPr lang="en-US" sz="1300" dirty="0"/>
           </a:p>
         </p:txBody>
       </p:sp>
@@ -18009,7 +17929,7 @@
 
 <file path=ppt/slides/slide30.xml><?xml version="1.0" encoding="utf-8"?>
 <p:sld xmlns:a="http://schemas.openxmlformats.org/drawingml/2006/main" xmlns:r="http://schemas.openxmlformats.org/officeDocument/2006/relationships" xmlns:p="http://schemas.openxmlformats.org/presentationml/2006/main">
-  <p:cSld name="Slide 30">
+  <p:cSld name="Slide 29">
     <p:spTree>
       <p:nvGrpSpPr>
         <p:cNvPr id="1" name=""/>
@@ -18089,6 +18009,470 @@
                 <a:ea typeface="Arial" pitchFamily="34" charset="-122"/>
                 <a:cs typeface="Arial" pitchFamily="34" charset="-120"/>
               </a:rPr>
+              <a:t>update() y delete(): el recurso que no existe</a:t>
+            </a:r>
+            <a:endParaRPr lang="en-US" sz="2600" dirty="0"/>
+          </a:p>
+        </p:txBody>
+      </p:sp>
+      <p:sp>
+        <p:nvSpPr>
+          <p:cNvPr id="4" name="Text 2"/>
+          <p:cNvSpPr/>
+          <p:nvPr/>
+        </p:nvSpPr>
+        <p:spPr>
+          <a:xfrm>
+            <a:off x="548640" y="6473952"/>
+            <a:ext cx="11091672" cy="292608"/>
+          </a:xfrm>
+          <a:prstGeom prst="rect">
+            <a:avLst/>
+          </a:prstGeom>
+          <a:noFill/>
+          <a:ln/>
+        </p:spPr>
+        <p:txBody>
+          <a:bodyPr wrap="square" rtlCol="0" anchor="ctr"/>
+          <a:lstStyle/>
+          <a:p>
+            <a:pPr marL="0" indent="0" algn="r">
+              <a:buNone/>
+            </a:pPr>
+            <a:r>
+              <a:rPr lang="en-US" sz="1100" dirty="0">
+                <a:solidFill>
+                  <a:srgbClr val="757575"/>
+                </a:solidFill>
+                <a:latin typeface="Arial" pitchFamily="34" charset="0"/>
+                <a:ea typeface="Arial" pitchFamily="34" charset="-122"/>
+                <a:cs typeface="Arial" pitchFamily="34" charset="-120"/>
+              </a:rPr>
+              <a:t>Acceso a Datos — Tema 1: CRUD y transacciones</a:t>
+            </a:r>
+            <a:endParaRPr lang="en-US" sz="1100" dirty="0"/>
+          </a:p>
+        </p:txBody>
+      </p:sp>
+      <p:sp>
+        <p:nvSpPr>
+          <p:cNvPr id="5" name="Text 3"/>
+          <p:cNvSpPr/>
+          <p:nvPr/>
+        </p:nvSpPr>
+        <p:spPr>
+          <a:xfrm>
+            <a:off x="548640" y="1417320"/>
+            <a:ext cx="11091672" cy="502920"/>
+          </a:xfrm>
+          <a:prstGeom prst="rect">
+            <a:avLst/>
+          </a:prstGeom>
+          <a:noFill/>
+          <a:ln/>
+        </p:spPr>
+        <p:txBody>
+          <a:bodyPr wrap="square" rtlCol="0" anchor="t"/>
+          <a:lstStyle/>
+          <a:p>
+            <a:pPr marL="0" indent="0">
+              <a:buNone/>
+            </a:pPr>
+            <a:r>
+              <a:rPr lang="en-US" sz="1900" dirty="0">
+                <a:solidFill>
+                  <a:srgbClr val="212121"/>
+                </a:solidFill>
+                <a:latin typeface="Arial" pitchFamily="34" charset="0"/>
+                <a:ea typeface="Arial" pitchFamily="34" charset="-122"/>
+                <a:cs typeface="Arial" pitchFamily="34" charset="-120"/>
+              </a:rPr>
+              <a:t>update() reutiliza LibroCreateDTO y sigue un patrón parecido, con un matiz: primero tiene que cargar el libro que ya existe.</a:t>
+            </a:r>
+            <a:endParaRPr lang="en-US" sz="1900" dirty="0"/>
+          </a:p>
+        </p:txBody>
+      </p:sp>
+      <p:sp>
+        <p:nvSpPr>
+          <p:cNvPr id="6" name="Shape 4"/>
+          <p:cNvSpPr/>
+          <p:nvPr/>
+        </p:nvSpPr>
+        <p:spPr>
+          <a:xfrm>
+            <a:off x="548640" y="2194560"/>
+            <a:ext cx="11091672" cy="3383280"/>
+          </a:xfrm>
+          <a:prstGeom prst="rect">
+            <a:avLst/>
+          </a:prstGeom>
+          <a:solidFill>
+            <a:srgbClr val="ECEFF1"/>
+          </a:solidFill>
+          <a:ln w="12700">
+            <a:solidFill>
+              <a:srgbClr val="EEEEEE"/>
+            </a:solidFill>
+            <a:prstDash val="solid"/>
+          </a:ln>
+        </p:spPr>
+        <p:txBody>
+          <a:bodyPr/>
+          <a:lstStyle/>
+          <a:p>
+            <a:endParaRPr lang="es-ES"/>
+          </a:p>
+        </p:txBody>
+      </p:sp>
+      <p:sp>
+        <p:nvSpPr>
+          <p:cNvPr id="7" name="Shape 5"/>
+          <p:cNvSpPr/>
+          <p:nvPr/>
+        </p:nvSpPr>
+        <p:spPr>
+          <a:xfrm>
+            <a:off x="548640" y="2194560"/>
+            <a:ext cx="73152" cy="3383280"/>
+          </a:xfrm>
+          <a:prstGeom prst="rect">
+            <a:avLst/>
+          </a:prstGeom>
+          <a:solidFill>
+            <a:srgbClr val="E64A19"/>
+          </a:solidFill>
+          <a:ln w="12700">
+            <a:solidFill>
+              <a:srgbClr val="E64A19"/>
+            </a:solidFill>
+            <a:prstDash val="solid"/>
+          </a:ln>
+        </p:spPr>
+        <p:txBody>
+          <a:bodyPr/>
+          <a:lstStyle/>
+          <a:p>
+            <a:endParaRPr lang="es-ES"/>
+          </a:p>
+        </p:txBody>
+      </p:sp>
+      <p:sp>
+        <p:nvSpPr>
+          <p:cNvPr id="8" name="Text 6"/>
+          <p:cNvSpPr/>
+          <p:nvPr/>
+        </p:nvSpPr>
+        <p:spPr>
+          <a:xfrm>
+            <a:off x="822960" y="2304288"/>
+            <a:ext cx="10588752" cy="3163824"/>
+          </a:xfrm>
+          <a:prstGeom prst="rect">
+            <a:avLst/>
+          </a:prstGeom>
+          <a:noFill/>
+          <a:ln/>
+        </p:spPr>
+        <p:txBody>
+          <a:bodyPr wrap="square" rtlCol="0" anchor="t"/>
+          <a:lstStyle/>
+          <a:p>
+            <a:pPr marL="0" indent="0">
+              <a:buNone/>
+            </a:pPr>
+            <a:r>
+              <a:rPr lang="en-US" sz="1300" dirty="0">
+                <a:solidFill>
+                  <a:srgbClr val="263238"/>
+                </a:solidFill>
+                <a:latin typeface="Courier New" pitchFamily="34" charset="0"/>
+                <a:ea typeface="Courier New" pitchFamily="34" charset="-122"/>
+                <a:cs typeface="Courier New" pitchFamily="34" charset="-120"/>
+              </a:rPr>
+              <a:t>@Transactional</a:t>
+            </a:r>
+            <a:endParaRPr lang="en-US" sz="1300" dirty="0"/>
+          </a:p>
+          <a:p>
+            <a:pPr marL="0" indent="0">
+              <a:buNone/>
+            </a:pPr>
+            <a:r>
+              <a:rPr lang="en-US" sz="1300" dirty="0">
+                <a:solidFill>
+                  <a:srgbClr val="263238"/>
+                </a:solidFill>
+                <a:latin typeface="Courier New" pitchFamily="34" charset="0"/>
+                <a:ea typeface="Courier New" pitchFamily="34" charset="-122"/>
+                <a:cs typeface="Courier New" pitchFamily="34" charset="-120"/>
+              </a:rPr>
+              <a:t>public LibroResponseDTO update(Long id, LibroCreateDTO dto) {</a:t>
+            </a:r>
+            <a:endParaRPr lang="en-US" sz="1300" dirty="0"/>
+          </a:p>
+          <a:p>
+            <a:pPr marL="0" indent="0">
+              <a:buNone/>
+            </a:pPr>
+            <a:r>
+              <a:rPr lang="en-US" sz="1300" dirty="0">
+                <a:solidFill>
+                  <a:srgbClr val="263238"/>
+                </a:solidFill>
+                <a:latin typeface="Courier New" pitchFamily="34" charset="0"/>
+                <a:ea typeface="Courier New" pitchFamily="34" charset="-122"/>
+                <a:cs typeface="Courier New" pitchFamily="34" charset="-120"/>
+              </a:rPr>
+              <a:t>    Libro libro = libroRepository.findById(id)</a:t>
+            </a:r>
+            <a:endParaRPr lang="en-US" sz="1300" dirty="0"/>
+          </a:p>
+          <a:p>
+            <a:pPr marL="0" indent="0">
+              <a:buNone/>
+            </a:pPr>
+            <a:r>
+              <a:rPr lang="en-US" sz="1300" dirty="0">
+                <a:solidFill>
+                  <a:srgbClr val="263238"/>
+                </a:solidFill>
+                <a:latin typeface="Courier New" pitchFamily="34" charset="0"/>
+                <a:ea typeface="Courier New" pitchFamily="34" charset="-122"/>
+                <a:cs typeface="Courier New" pitchFamily="34" charset="-120"/>
+              </a:rPr>
+              <a:t>            .orElseThrow(() -&gt; new ResponseStatusException(HttpStatus.NOT_FOUND, "Libro no encontrado"));</a:t>
+            </a:r>
+            <a:endParaRPr lang="en-US" sz="1300" dirty="0"/>
+          </a:p>
+          <a:p>
+            <a:pPr marL="0" indent="0">
+              <a:buNone/>
+            </a:pPr>
+            <a:r>
+              <a:rPr lang="en-US" sz="1300" dirty="0">
+                <a:solidFill>
+                  <a:srgbClr val="263238"/>
+                </a:solidFill>
+                <a:latin typeface="Courier New" pitchFamily="34" charset="0"/>
+                <a:ea typeface="Courier New" pitchFamily="34" charset="-122"/>
+                <a:cs typeface="Courier New" pitchFamily="34" charset="-120"/>
+              </a:rPr>
+              <a:t>    Editorial editorial = editorialRepository.findById(dto.editorialId())</a:t>
+            </a:r>
+            <a:endParaRPr lang="en-US" sz="1300" dirty="0"/>
+          </a:p>
+          <a:p>
+            <a:pPr marL="0" indent="0">
+              <a:buNone/>
+            </a:pPr>
+            <a:r>
+              <a:rPr lang="en-US" sz="1300" dirty="0">
+                <a:solidFill>
+                  <a:srgbClr val="263238"/>
+                </a:solidFill>
+                <a:latin typeface="Courier New" pitchFamily="34" charset="0"/>
+                <a:ea typeface="Courier New" pitchFamily="34" charset="-122"/>
+                <a:cs typeface="Courier New" pitchFamily="34" charset="-120"/>
+              </a:rPr>
+              <a:t>            .orElseThrow(() -&gt; new ResponseStatusException(HttpStatus.NOT_FOUND, "Editorial no encontrada"));</a:t>
+            </a:r>
+            <a:endParaRPr lang="en-US" sz="1300" dirty="0"/>
+          </a:p>
+          <a:p>
+            <a:pPr marL="0" indent="0">
+              <a:buNone/>
+            </a:pPr>
+            <a:r>
+              <a:rPr lang="en-US" sz="1300" dirty="0">
+                <a:solidFill>
+                  <a:srgbClr val="263238"/>
+                </a:solidFill>
+                <a:latin typeface="Courier New" pitchFamily="34" charset="0"/>
+                <a:ea typeface="Courier New" pitchFamily="34" charset="-122"/>
+                <a:cs typeface="Courier New" pitchFamily="34" charset="-120"/>
+              </a:rPr>
+              <a:t>    libro.setTitulo(dto.titulo());</a:t>
+            </a:r>
+            <a:endParaRPr lang="en-US" sz="1300" dirty="0"/>
+          </a:p>
+          <a:p>
+            <a:pPr marL="0" indent="0">
+              <a:buNone/>
+            </a:pPr>
+            <a:r>
+              <a:rPr lang="en-US" sz="1300" dirty="0">
+                <a:solidFill>
+                  <a:srgbClr val="263238"/>
+                </a:solidFill>
+                <a:latin typeface="Courier New" pitchFamily="34" charset="0"/>
+                <a:ea typeface="Courier New" pitchFamily="34" charset="-122"/>
+                <a:cs typeface="Courier New" pitchFamily="34" charset="-120"/>
+              </a:rPr>
+              <a:t>    libro.setPrecio(dto.precio());</a:t>
+            </a:r>
+            <a:endParaRPr lang="en-US" sz="1300" dirty="0"/>
+          </a:p>
+          <a:p>
+            <a:pPr marL="0" indent="0">
+              <a:buNone/>
+            </a:pPr>
+            <a:r>
+              <a:rPr lang="en-US" sz="1300" dirty="0">
+                <a:solidFill>
+                  <a:srgbClr val="263238"/>
+                </a:solidFill>
+                <a:latin typeface="Courier New" pitchFamily="34" charset="0"/>
+                <a:ea typeface="Courier New" pitchFamily="34" charset="-122"/>
+                <a:cs typeface="Courier New" pitchFamily="34" charset="-120"/>
+              </a:rPr>
+              <a:t>    libro.setFechaPublicacion(dto.fechaPublicacion());</a:t>
+            </a:r>
+            <a:endParaRPr lang="en-US" sz="1300" dirty="0"/>
+          </a:p>
+          <a:p>
+            <a:pPr marL="0" indent="0">
+              <a:buNone/>
+            </a:pPr>
+            <a:r>
+              <a:rPr lang="en-US" sz="1300" dirty="0">
+                <a:solidFill>
+                  <a:srgbClr val="263238"/>
+                </a:solidFill>
+                <a:latin typeface="Courier New" pitchFamily="34" charset="0"/>
+                <a:ea typeface="Courier New" pitchFamily="34" charset="-122"/>
+                <a:cs typeface="Courier New" pitchFamily="34" charset="-120"/>
+              </a:rPr>
+              <a:t>    libro.setEditorial(editorial);</a:t>
+            </a:r>
+            <a:endParaRPr lang="en-US" sz="1300" dirty="0"/>
+          </a:p>
+          <a:p>
+            <a:pPr marL="0" indent="0">
+              <a:buNone/>
+            </a:pPr>
+            <a:r>
+              <a:rPr lang="en-US" sz="1300" dirty="0">
+                <a:solidFill>
+                  <a:srgbClr val="263238"/>
+                </a:solidFill>
+                <a:latin typeface="Courier New" pitchFamily="34" charset="0"/>
+                <a:ea typeface="Courier New" pitchFamily="34" charset="-122"/>
+                <a:cs typeface="Courier New" pitchFamily="34" charset="-120"/>
+              </a:rPr>
+              <a:t>    return mapToDTO(libroRepository.save(libro));</a:t>
+            </a:r>
+            <a:endParaRPr lang="en-US" sz="1300" dirty="0"/>
+          </a:p>
+          <a:p>
+            <a:pPr marL="0" indent="0">
+              <a:buNone/>
+            </a:pPr>
+            <a:r>
+              <a:rPr lang="en-US" sz="1300" dirty="0">
+                <a:solidFill>
+                  <a:srgbClr val="263238"/>
+                </a:solidFill>
+                <a:latin typeface="Courier New" pitchFamily="34" charset="0"/>
+                <a:ea typeface="Courier New" pitchFamily="34" charset="-122"/>
+                <a:cs typeface="Courier New" pitchFamily="34" charset="-120"/>
+              </a:rPr>
+              <a:t>}</a:t>
+            </a:r>
+            <a:endParaRPr lang="en-US" sz="1300" dirty="0"/>
+          </a:p>
+        </p:txBody>
+      </p:sp>
+    </p:spTree>
+  </p:cSld>
+  <p:clrMapOvr>
+    <a:masterClrMapping/>
+  </p:clrMapOvr>
+</p:sld>
+</file>
+
+<file path=ppt/slides/slide31.xml><?xml version="1.0" encoding="utf-8"?>
+<p:sld xmlns:a="http://schemas.openxmlformats.org/drawingml/2006/main" xmlns:r="http://schemas.openxmlformats.org/officeDocument/2006/relationships" xmlns:p="http://schemas.openxmlformats.org/presentationml/2006/main">
+  <p:cSld name="Slide 30">
+    <p:spTree>
+      <p:nvGrpSpPr>
+        <p:cNvPr id="1" name=""/>
+        <p:cNvGrpSpPr/>
+        <p:nvPr/>
+      </p:nvGrpSpPr>
+      <p:grpSpPr>
+        <a:xfrm>
+          <a:off x="0" y="0"/>
+          <a:ext cx="0" cy="0"/>
+          <a:chOff x="0" y="0"/>
+          <a:chExt cx="0" cy="0"/>
+        </a:xfrm>
+      </p:grpSpPr>
+      <p:sp>
+        <p:nvSpPr>
+          <p:cNvPr id="2" name="Shape 0"/>
+          <p:cNvSpPr/>
+          <p:nvPr/>
+        </p:nvSpPr>
+        <p:spPr>
+          <a:xfrm>
+            <a:off x="0" y="0"/>
+            <a:ext cx="12188952" cy="777240"/>
+          </a:xfrm>
+          <a:prstGeom prst="rect">
+            <a:avLst/>
+          </a:prstGeom>
+          <a:solidFill>
+            <a:srgbClr val="7F0000"/>
+          </a:solidFill>
+          <a:ln w="12700">
+            <a:solidFill>
+              <a:srgbClr val="7F0000"/>
+            </a:solidFill>
+            <a:prstDash val="solid"/>
+          </a:ln>
+        </p:spPr>
+        <p:txBody>
+          <a:bodyPr/>
+          <a:lstStyle/>
+          <a:p>
+            <a:endParaRPr lang="es-ES"/>
+          </a:p>
+        </p:txBody>
+      </p:sp>
+      <p:sp>
+        <p:nvSpPr>
+          <p:cNvPr id="3" name="Text 1"/>
+          <p:cNvSpPr/>
+          <p:nvPr/>
+        </p:nvSpPr>
+        <p:spPr>
+          <a:xfrm>
+            <a:off x="365760" y="0"/>
+            <a:ext cx="11457432" cy="777240"/>
+          </a:xfrm>
+          <a:prstGeom prst="rect">
+            <a:avLst/>
+          </a:prstGeom>
+          <a:noFill/>
+          <a:ln/>
+        </p:spPr>
+        <p:txBody>
+          <a:bodyPr wrap="square" rtlCol="0" anchor="ctr"/>
+          <a:lstStyle/>
+          <a:p>
+            <a:pPr marL="0" indent="0">
+              <a:buNone/>
+            </a:pPr>
+            <a:r>
+              <a:rPr lang="en-US" sz="2600" b="1" dirty="0">
+                <a:solidFill>
+                  <a:srgbClr val="FFFFFF"/>
+                </a:solidFill>
+                <a:latin typeface="Arial" pitchFamily="34" charset="0"/>
+                <a:ea typeface="Arial" pitchFamily="34" charset="-122"/>
+                <a:cs typeface="Arial" pitchFamily="34" charset="-120"/>
+              </a:rPr>
               <a:t>update() y delete() (cont.)</a:t>
             </a:r>
             <a:endParaRPr lang="en-US" sz="2600" dirty="0"/>
@@ -18386,7 +18770,7 @@
 </p:sld>
 </file>
 
-<file path=ppt/slides/slide31.xml><?xml version="1.0" encoding="utf-8"?>
+<file path=ppt/slides/slide32.xml><?xml version="1.0" encoding="utf-8"?>
 <p:sld xmlns:a="http://schemas.openxmlformats.org/drawingml/2006/main" xmlns:r="http://schemas.openxmlformats.org/officeDocument/2006/relationships" xmlns:p="http://schemas.openxmlformats.org/presentationml/2006/main">
   <p:cSld name="Slide 31">
     <p:spTree>
@@ -18592,7 +18976,7 @@
 </p:sld>
 </file>
 
-<file path=ppt/slides/slide32.xml><?xml version="1.0" encoding="utf-8"?>
+<file path=ppt/slides/slide33.xml><?xml version="1.0" encoding="utf-8"?>
 <p:sld xmlns:a="http://schemas.openxmlformats.org/drawingml/2006/main" xmlns:r="http://schemas.openxmlformats.org/officeDocument/2006/relationships" xmlns:p="http://schemas.openxmlformats.org/presentationml/2006/main">
   <p:cSld name="Slide 32">
     <p:spTree>
@@ -18837,7 +19221,7 @@
 </p:sld>
 </file>
 
-<file path=ppt/slides/slide33.xml><?xml version="1.0" encoding="utf-8"?>
+<file path=ppt/slides/slide34.xml><?xml version="1.0" encoding="utf-8"?>
 <p:sld xmlns:a="http://schemas.openxmlformats.org/drawingml/2006/main" xmlns:r="http://schemas.openxmlformats.org/officeDocument/2006/relationships" xmlns:p="http://schemas.openxmlformats.org/presentationml/2006/main">
   <p:cSld name="Slide 33">
     <p:spTree>
@@ -19035,7 +19419,7 @@
 </p:sld>
 </file>
 
-<file path=ppt/slides/slide34.xml><?xml version="1.0" encoding="utf-8"?>
+<file path=ppt/slides/slide35.xml><?xml version="1.0" encoding="utf-8"?>
 <p:sld xmlns:a="http://schemas.openxmlformats.org/drawingml/2006/main" xmlns:r="http://schemas.openxmlformats.org/officeDocument/2006/relationships" xmlns:p="http://schemas.openxmlformats.org/presentationml/2006/main">
   <p:cSld name="Slide 34">
     <p:spTree>
@@ -19927,7 +20311,7 @@
 </p:sld>
 </file>
 
-<file path=ppt/slides/slide35.xml><?xml version="1.0" encoding="utf-8"?>
+<file path=ppt/slides/slide36.xml><?xml version="1.0" encoding="utf-8"?>
 <p:sld xmlns:a="http://schemas.openxmlformats.org/drawingml/2006/main" xmlns:r="http://schemas.openxmlformats.org/officeDocument/2006/relationships" xmlns:p="http://schemas.openxmlformats.org/presentationml/2006/main">
   <p:cSld name="Slide 35">
     <p:spTree>
@@ -20186,7 +20570,7 @@
 </p:sld>
 </file>
 
-<file path=ppt/slides/slide36.xml><?xml version="1.0" encoding="utf-8"?>
+<file path=ppt/slides/slide37.xml><?xml version="1.0" encoding="utf-8"?>
 <p:sld xmlns:a="http://schemas.openxmlformats.org/drawingml/2006/main" xmlns:r="http://schemas.openxmlformats.org/officeDocument/2006/relationships" xmlns:p="http://schemas.openxmlformats.org/presentationml/2006/main">
   <p:cSld name="Slide 36">
     <p:spTree>
@@ -20384,7 +20768,7 @@
 </p:sld>
 </file>
 
-<file path=ppt/slides/slide37.xml><?xml version="1.0" encoding="utf-8"?>
+<file path=ppt/slides/slide38.xml><?xml version="1.0" encoding="utf-8"?>
 <p:sld xmlns:a="http://schemas.openxmlformats.org/drawingml/2006/main" xmlns:r="http://schemas.openxmlformats.org/officeDocument/2006/relationships" xmlns:p="http://schemas.openxmlformats.org/presentationml/2006/main">
   <p:cSld name="Slide 37">
     <p:spTree>
@@ -20783,7 +21167,7 @@
 </p:sld>
 </file>
 
-<file path=ppt/slides/slide38.xml><?xml version="1.0" encoding="utf-8"?>
+<file path=ppt/slides/slide39.xml><?xml version="1.0" encoding="utf-8"?>
 <p:sld xmlns:a="http://schemas.openxmlformats.org/drawingml/2006/main" xmlns:r="http://schemas.openxmlformats.org/officeDocument/2006/relationships" xmlns:p="http://schemas.openxmlformats.org/presentationml/2006/main">
   <p:cSld name="Slide 38">
     <p:spTree>
@@ -21582,9 +21966,9 @@
 </p:sld>
 </file>
 
-<file path=ppt/slides/slide39.xml><?xml version="1.0" encoding="utf-8"?>
+<file path=ppt/slides/slide4.xml><?xml version="1.0" encoding="utf-8"?>
 <p:sld xmlns:a="http://schemas.openxmlformats.org/drawingml/2006/main" xmlns:r="http://schemas.openxmlformats.org/officeDocument/2006/relationships" xmlns:p="http://schemas.openxmlformats.org/presentationml/2006/main">
-  <p:cSld name="Slide 39">
+  <p:cSld name="Slide 4">
     <p:spTree>
       <p:nvGrpSpPr>
         <p:cNvPr id="1" name=""/>
@@ -21664,6 +22048,283 @@
                 <a:ea typeface="Arial" pitchFamily="34" charset="-122"/>
                 <a:cs typeface="Arial" pitchFamily="34" charset="-120"/>
               </a:rPr>
+              <a:t>La primera pieza: el repository</a:t>
+            </a:r>
+            <a:endParaRPr lang="en-US" sz="2600" dirty="0"/>
+          </a:p>
+        </p:txBody>
+      </p:sp>
+      <p:sp>
+        <p:nvSpPr>
+          <p:cNvPr id="4" name="Text 2"/>
+          <p:cNvSpPr/>
+          <p:nvPr/>
+        </p:nvSpPr>
+        <p:spPr>
+          <a:xfrm>
+            <a:off x="548640" y="6473952"/>
+            <a:ext cx="11091672" cy="292608"/>
+          </a:xfrm>
+          <a:prstGeom prst="rect">
+            <a:avLst/>
+          </a:prstGeom>
+          <a:noFill/>
+          <a:ln/>
+        </p:spPr>
+        <p:txBody>
+          <a:bodyPr wrap="square" rtlCol="0" anchor="ctr"/>
+          <a:lstStyle/>
+          <a:p>
+            <a:pPr marL="0" indent="0" algn="r">
+              <a:buNone/>
+            </a:pPr>
+            <a:r>
+              <a:rPr lang="en-US" sz="1100" dirty="0">
+                <a:solidFill>
+                  <a:srgbClr val="757575"/>
+                </a:solidFill>
+                <a:latin typeface="Arial" pitchFamily="34" charset="0"/>
+                <a:ea typeface="Arial" pitchFamily="34" charset="-122"/>
+                <a:cs typeface="Arial" pitchFamily="34" charset="-120"/>
+              </a:rPr>
+              <a:t>Acceso a Datos — Tema 1: CRUD y transacciones</a:t>
+            </a:r>
+            <a:endParaRPr lang="en-US" sz="1100" dirty="0"/>
+          </a:p>
+        </p:txBody>
+      </p:sp>
+      <p:sp>
+        <p:nvSpPr>
+          <p:cNvPr id="5" name="Text 3"/>
+          <p:cNvSpPr/>
+          <p:nvPr/>
+        </p:nvSpPr>
+        <p:spPr>
+          <a:xfrm>
+            <a:off x="548640" y="2286000"/>
+            <a:ext cx="11091672" cy="1783080"/>
+          </a:xfrm>
+          <a:prstGeom prst="rect">
+            <a:avLst/>
+          </a:prstGeom>
+          <a:noFill/>
+          <a:ln/>
+        </p:spPr>
+        <p:txBody>
+          <a:bodyPr wrap="square" rtlCol="0" anchor="t"/>
+          <a:lstStyle/>
+          <a:p>
+            <a:pPr marL="0" indent="0">
+              <a:buNone/>
+            </a:pPr>
+            <a:r>
+              <a:rPr lang="en-US" sz="2100" dirty="0">
+                <a:solidFill>
+                  <a:srgbClr val="212121"/>
+                </a:solidFill>
+                <a:latin typeface="Arial" pitchFamily="34" charset="0"/>
+                <a:ea typeface="Arial" pitchFamily="34" charset="-122"/>
+                <a:cs typeface="Arial" pitchFamily="34" charset="-120"/>
+              </a:rPr>
+              <a:t>El repository es quien de verdad habla con la base de datos. Con JDBC "a pelo" escribir un repository significa escribir tú mismo cada consulta SQL. Con Spring Data JPA ese trabajo desaparece casi por completo: declaras una interfaz vacía, y Spring te da una implementación real ya funcionando.</a:t>
+            </a:r>
+            <a:endParaRPr lang="en-US" sz="2100" dirty="0"/>
+          </a:p>
+        </p:txBody>
+      </p:sp>
+      <p:sp>
+        <p:nvSpPr>
+          <p:cNvPr id="6" name="Shape 4"/>
+          <p:cNvSpPr/>
+          <p:nvPr/>
+        </p:nvSpPr>
+        <p:spPr>
+          <a:xfrm>
+            <a:off x="548640" y="4480560"/>
+            <a:ext cx="11091672" cy="822960"/>
+          </a:xfrm>
+          <a:prstGeom prst="rect">
+            <a:avLst/>
+          </a:prstGeom>
+          <a:solidFill>
+            <a:srgbClr val="ECEFF1"/>
+          </a:solidFill>
+          <a:ln w="12700">
+            <a:solidFill>
+              <a:srgbClr val="EEEEEE"/>
+            </a:solidFill>
+            <a:prstDash val="solid"/>
+          </a:ln>
+        </p:spPr>
+        <p:txBody>
+          <a:bodyPr/>
+          <a:lstStyle/>
+          <a:p>
+            <a:endParaRPr lang="es-ES"/>
+          </a:p>
+        </p:txBody>
+      </p:sp>
+      <p:sp>
+        <p:nvSpPr>
+          <p:cNvPr id="7" name="Shape 5"/>
+          <p:cNvSpPr/>
+          <p:nvPr/>
+        </p:nvSpPr>
+        <p:spPr>
+          <a:xfrm>
+            <a:off x="548640" y="4480560"/>
+            <a:ext cx="73152" cy="822960"/>
+          </a:xfrm>
+          <a:prstGeom prst="rect">
+            <a:avLst/>
+          </a:prstGeom>
+          <a:solidFill>
+            <a:srgbClr val="E64A19"/>
+          </a:solidFill>
+          <a:ln w="12700">
+            <a:solidFill>
+              <a:srgbClr val="E64A19"/>
+            </a:solidFill>
+            <a:prstDash val="solid"/>
+          </a:ln>
+        </p:spPr>
+        <p:txBody>
+          <a:bodyPr/>
+          <a:lstStyle/>
+          <a:p>
+            <a:endParaRPr lang="es-ES"/>
+          </a:p>
+        </p:txBody>
+      </p:sp>
+      <p:sp>
+        <p:nvSpPr>
+          <p:cNvPr id="8" name="Text 6"/>
+          <p:cNvSpPr/>
+          <p:nvPr/>
+        </p:nvSpPr>
+        <p:spPr>
+          <a:xfrm>
+            <a:off x="822960" y="4590288"/>
+            <a:ext cx="10588752" cy="603504"/>
+          </a:xfrm>
+          <a:prstGeom prst="rect">
+            <a:avLst/>
+          </a:prstGeom>
+          <a:noFill/>
+          <a:ln/>
+        </p:spPr>
+        <p:txBody>
+          <a:bodyPr wrap="square" rtlCol="0" anchor="t"/>
+          <a:lstStyle/>
+          <a:p>
+            <a:pPr marL="0" indent="0">
+              <a:buNone/>
+            </a:pPr>
+            <a:r>
+              <a:rPr lang="en-US" sz="1700" dirty="0">
+                <a:solidFill>
+                  <a:srgbClr val="263238"/>
+                </a:solidFill>
+                <a:latin typeface="Courier New" pitchFamily="34" charset="0"/>
+                <a:ea typeface="Courier New" pitchFamily="34" charset="-122"/>
+                <a:cs typeface="Courier New" pitchFamily="34" charset="-120"/>
+              </a:rPr>
+              <a:t>public interface LibroRepository extends JpaRepository&lt;Libro, Long&gt; {}</a:t>
+            </a:r>
+            <a:endParaRPr lang="en-US" sz="1700" dirty="0"/>
+          </a:p>
+        </p:txBody>
+      </p:sp>
+    </p:spTree>
+  </p:cSld>
+  <p:clrMapOvr>
+    <a:masterClrMapping/>
+  </p:clrMapOvr>
+</p:sld>
+</file>
+
+<file path=ppt/slides/slide40.xml><?xml version="1.0" encoding="utf-8"?>
+<p:sld xmlns:a="http://schemas.openxmlformats.org/drawingml/2006/main" xmlns:r="http://schemas.openxmlformats.org/officeDocument/2006/relationships" xmlns:p="http://schemas.openxmlformats.org/presentationml/2006/main">
+  <p:cSld name="Slide 39">
+    <p:spTree>
+      <p:nvGrpSpPr>
+        <p:cNvPr id="1" name=""/>
+        <p:cNvGrpSpPr/>
+        <p:nvPr/>
+      </p:nvGrpSpPr>
+      <p:grpSpPr>
+        <a:xfrm>
+          <a:off x="0" y="0"/>
+          <a:ext cx="0" cy="0"/>
+          <a:chOff x="0" y="0"/>
+          <a:chExt cx="0" cy="0"/>
+        </a:xfrm>
+      </p:grpSpPr>
+      <p:sp>
+        <p:nvSpPr>
+          <p:cNvPr id="2" name="Shape 0"/>
+          <p:cNvSpPr/>
+          <p:nvPr/>
+        </p:nvSpPr>
+        <p:spPr>
+          <a:xfrm>
+            <a:off x="0" y="0"/>
+            <a:ext cx="12188952" cy="777240"/>
+          </a:xfrm>
+          <a:prstGeom prst="rect">
+            <a:avLst/>
+          </a:prstGeom>
+          <a:solidFill>
+            <a:srgbClr val="7F0000"/>
+          </a:solidFill>
+          <a:ln w="12700">
+            <a:solidFill>
+              <a:srgbClr val="7F0000"/>
+            </a:solidFill>
+            <a:prstDash val="solid"/>
+          </a:ln>
+        </p:spPr>
+        <p:txBody>
+          <a:bodyPr/>
+          <a:lstStyle/>
+          <a:p>
+            <a:endParaRPr lang="es-ES"/>
+          </a:p>
+        </p:txBody>
+      </p:sp>
+      <p:sp>
+        <p:nvSpPr>
+          <p:cNvPr id="3" name="Text 1"/>
+          <p:cNvSpPr/>
+          <p:nvPr/>
+        </p:nvSpPr>
+        <p:spPr>
+          <a:xfrm>
+            <a:off x="365760" y="0"/>
+            <a:ext cx="11457432" cy="777240"/>
+          </a:xfrm>
+          <a:prstGeom prst="rect">
+            <a:avLst/>
+          </a:prstGeom>
+          <a:noFill/>
+          <a:ln/>
+        </p:spPr>
+        <p:txBody>
+          <a:bodyPr wrap="square" rtlCol="0" anchor="ctr"/>
+          <a:lstStyle/>
+          <a:p>
+            <a:pPr marL="0" indent="0">
+              <a:buNone/>
+            </a:pPr>
+            <a:r>
+              <a:rPr lang="en-US" sz="2600" b="1" dirty="0">
+                <a:solidFill>
+                  <a:srgbClr val="FFFFFF"/>
+                </a:solidFill>
+                <a:latin typeface="Arial" pitchFamily="34" charset="0"/>
+                <a:ea typeface="Arial" pitchFamily="34" charset="-122"/>
+                <a:cs typeface="Arial" pitchFamily="34" charset="-120"/>
+              </a:rPr>
               <a:t>Las piezas juntas: el LibroController completo</a:t>
             </a:r>
             <a:endParaRPr lang="en-US" sz="2600" dirty="0"/>
@@ -22092,9 +22753,9 @@
 </p:sld>
 </file>
 
-<file path=ppt/slides/slide4.xml><?xml version="1.0" encoding="utf-8"?>
+<file path=ppt/slides/slide41.xml><?xml version="1.0" encoding="utf-8"?>
 <p:sld xmlns:a="http://schemas.openxmlformats.org/drawingml/2006/main" xmlns:r="http://schemas.openxmlformats.org/officeDocument/2006/relationships" xmlns:p="http://schemas.openxmlformats.org/presentationml/2006/main">
-  <p:cSld name="Slide 4">
+  <p:cSld name="Slide 40">
     <p:spTree>
       <p:nvGrpSpPr>
         <p:cNvPr id="1" name=""/>
@@ -22174,7 +22835,7 @@
                 <a:ea typeface="Arial" pitchFamily="34" charset="-122"/>
                 <a:cs typeface="Arial" pitchFamily="34" charset="-120"/>
               </a:rPr>
-              <a:t>La primera pieza: el repository</a:t>
+              <a:t>El LibroController completo (cont.)</a:t>
             </a:r>
             <a:endParaRPr lang="en-US" sz="2600" dirty="0"/>
           </a:p>
@@ -22221,53 +22882,14 @@
       </p:sp>
       <p:sp>
         <p:nvSpPr>
-          <p:cNvPr id="5" name="Text 3"/>
+          <p:cNvPr id="5" name="Shape 3"/>
           <p:cNvSpPr/>
           <p:nvPr/>
         </p:nvSpPr>
         <p:spPr>
           <a:xfrm>
-            <a:off x="548640" y="2286000"/>
-            <a:ext cx="11091672" cy="1783080"/>
-          </a:xfrm>
-          <a:prstGeom prst="rect">
-            <a:avLst/>
-          </a:prstGeom>
-          <a:noFill/>
-          <a:ln/>
-        </p:spPr>
-        <p:txBody>
-          <a:bodyPr wrap="square" rtlCol="0" anchor="t"/>
-          <a:lstStyle/>
-          <a:p>
-            <a:pPr marL="0" indent="0">
-              <a:buNone/>
-            </a:pPr>
-            <a:r>
-              <a:rPr lang="en-US" sz="2100" dirty="0">
-                <a:solidFill>
-                  <a:srgbClr val="212121"/>
-                </a:solidFill>
-                <a:latin typeface="Arial" pitchFamily="34" charset="0"/>
-                <a:ea typeface="Arial" pitchFamily="34" charset="-122"/>
-                <a:cs typeface="Arial" pitchFamily="34" charset="-120"/>
-              </a:rPr>
-              <a:t>El repository es quien de verdad habla con la base de datos. Con JDBC "a pelo" escribir un repository significa escribir tú mismo cada consulta SQL. Con Spring Data JPA ese trabajo desaparece casi por completo: declaras una interfaz vacía, y Spring te da una implementación real ya funcionando.</a:t>
-            </a:r>
-            <a:endParaRPr lang="en-US" sz="2100" dirty="0"/>
-          </a:p>
-        </p:txBody>
-      </p:sp>
-      <p:sp>
-        <p:nvSpPr>
-          <p:cNvPr id="6" name="Shape 4"/>
-          <p:cNvSpPr/>
-          <p:nvPr/>
-        </p:nvSpPr>
-        <p:spPr>
-          <a:xfrm>
-            <a:off x="548640" y="4480560"/>
-            <a:ext cx="11091672" cy="822960"/>
+            <a:off x="548640" y="1554480"/>
+            <a:ext cx="11091672" cy="3840480"/>
           </a:xfrm>
           <a:prstGeom prst="rect">
             <a:avLst/>
@@ -22292,14 +22914,14 @@
       </p:sp>
       <p:sp>
         <p:nvSpPr>
-          <p:cNvPr id="7" name="Shape 5"/>
+          <p:cNvPr id="6" name="Shape 4"/>
           <p:cNvSpPr/>
           <p:nvPr/>
         </p:nvSpPr>
         <p:spPr>
           <a:xfrm>
-            <a:off x="548640" y="4480560"/>
-            <a:ext cx="73152" cy="822960"/>
+            <a:off x="548640" y="1554480"/>
+            <a:ext cx="73152" cy="3840480"/>
           </a:xfrm>
           <a:prstGeom prst="rect">
             <a:avLst/>
@@ -22324,14 +22946,14 @@
       </p:sp>
       <p:sp>
         <p:nvSpPr>
-          <p:cNvPr id="8" name="Text 6"/>
+          <p:cNvPr id="7" name="Text 5"/>
           <p:cNvSpPr/>
           <p:nvPr/>
         </p:nvSpPr>
         <p:spPr>
           <a:xfrm>
-            <a:off x="822960" y="4590288"/>
-            <a:ext cx="10588752" cy="603504"/>
+            <a:off x="822960" y="1664208"/>
+            <a:ext cx="10588752" cy="3621024"/>
           </a:xfrm>
           <a:prstGeom prst="rect">
             <a:avLst/>
@@ -22347,7 +22969,7 @@
               <a:buNone/>
             </a:pPr>
             <a:r>
-              <a:rPr lang="en-US" sz="1700" dirty="0">
+              <a:rPr lang="en-US" sz="1300" dirty="0">
                 <a:solidFill>
                   <a:srgbClr val="263238"/>
                 </a:solidFill>
@@ -22355,9 +22977,242 @@
                 <a:ea typeface="Courier New" pitchFamily="34" charset="-122"/>
                 <a:cs typeface="Courier New" pitchFamily="34" charset="-120"/>
               </a:rPr>
-              <a:t>public interface LibroRepository extends JpaRepository&lt;Libro, Long&gt; {}</a:t>
-            </a:r>
-            <a:endParaRPr lang="en-US" sz="1700" dirty="0"/>
+              <a:t>    @PostMapping</a:t>
+            </a:r>
+            <a:endParaRPr lang="en-US" sz="1300" dirty="0"/>
+          </a:p>
+          <a:p>
+            <a:pPr marL="0" indent="0">
+              <a:buNone/>
+            </a:pPr>
+            <a:r>
+              <a:rPr lang="en-US" sz="1300" dirty="0">
+                <a:solidFill>
+                  <a:srgbClr val="263238"/>
+                </a:solidFill>
+                <a:latin typeface="Courier New" pitchFamily="34" charset="0"/>
+                <a:ea typeface="Courier New" pitchFamily="34" charset="-122"/>
+                <a:cs typeface="Courier New" pitchFamily="34" charset="-120"/>
+              </a:rPr>
+              <a:t>    public ResponseEntity&lt;LibroResponseDTO&gt; create(@Valid @RequestBody LibroCreateDTO dto) {</a:t>
+            </a:r>
+            <a:endParaRPr lang="en-US" sz="1300" dirty="0"/>
+          </a:p>
+          <a:p>
+            <a:pPr marL="0" indent="0">
+              <a:buNone/>
+            </a:pPr>
+            <a:r>
+              <a:rPr lang="en-US" sz="1300" dirty="0">
+                <a:solidFill>
+                  <a:srgbClr val="263238"/>
+                </a:solidFill>
+                <a:latin typeface="Courier New" pitchFamily="34" charset="0"/>
+                <a:ea typeface="Courier New" pitchFamily="34" charset="-122"/>
+                <a:cs typeface="Courier New" pitchFamily="34" charset="-120"/>
+              </a:rPr>
+              <a:t>        return ResponseEntity.status(HttpStatus.CREATED).body(libroService.create(dto));</a:t>
+            </a:r>
+            <a:endParaRPr lang="en-US" sz="1300" dirty="0"/>
+          </a:p>
+          <a:p>
+            <a:pPr marL="0" indent="0">
+              <a:buNone/>
+            </a:pPr>
+            <a:r>
+              <a:rPr lang="en-US" sz="1300" dirty="0">
+                <a:solidFill>
+                  <a:srgbClr val="263238"/>
+                </a:solidFill>
+                <a:latin typeface="Courier New" pitchFamily="34" charset="0"/>
+                <a:ea typeface="Courier New" pitchFamily="34" charset="-122"/>
+                <a:cs typeface="Courier New" pitchFamily="34" charset="-120"/>
+              </a:rPr>
+              <a:t>    }</a:t>
+            </a:r>
+            <a:endParaRPr lang="en-US" sz="1300" dirty="0"/>
+          </a:p>
+          <a:p>
+            <a:pPr marL="0" indent="0">
+              <a:buNone/>
+            </a:pPr>
+            <a:endParaRPr lang="en-US" sz="1300" dirty="0"/>
+          </a:p>
+          <a:p>
+            <a:pPr marL="0" indent="0">
+              <a:buNone/>
+            </a:pPr>
+            <a:r>
+              <a:rPr lang="en-US" sz="1300" dirty="0">
+                <a:solidFill>
+                  <a:srgbClr val="263238"/>
+                </a:solidFill>
+                <a:latin typeface="Courier New" pitchFamily="34" charset="0"/>
+                <a:ea typeface="Courier New" pitchFamily="34" charset="-122"/>
+                <a:cs typeface="Courier New" pitchFamily="34" charset="-120"/>
+              </a:rPr>
+              <a:t>    @PutMapping("/{id}")</a:t>
+            </a:r>
+            <a:endParaRPr lang="en-US" sz="1300" dirty="0"/>
+          </a:p>
+          <a:p>
+            <a:pPr marL="0" indent="0">
+              <a:buNone/>
+            </a:pPr>
+            <a:r>
+              <a:rPr lang="en-US" sz="1300" dirty="0">
+                <a:solidFill>
+                  <a:srgbClr val="263238"/>
+                </a:solidFill>
+                <a:latin typeface="Courier New" pitchFamily="34" charset="0"/>
+                <a:ea typeface="Courier New" pitchFamily="34" charset="-122"/>
+                <a:cs typeface="Courier New" pitchFamily="34" charset="-120"/>
+              </a:rPr>
+              <a:t>    public ResponseEntity&lt;LibroResponseDTO&gt; update(@PathVariable Long id, @Valid @RequestBody LibroCreateDTO dto) {</a:t>
+            </a:r>
+            <a:endParaRPr lang="en-US" sz="1300" dirty="0"/>
+          </a:p>
+          <a:p>
+            <a:pPr marL="0" indent="0">
+              <a:buNone/>
+            </a:pPr>
+            <a:r>
+              <a:rPr lang="en-US" sz="1300" dirty="0">
+                <a:solidFill>
+                  <a:srgbClr val="263238"/>
+                </a:solidFill>
+                <a:latin typeface="Courier New" pitchFamily="34" charset="0"/>
+                <a:ea typeface="Courier New" pitchFamily="34" charset="-122"/>
+                <a:cs typeface="Courier New" pitchFamily="34" charset="-120"/>
+              </a:rPr>
+              <a:t>        return ResponseEntity.ok(libroService.update(id, dto));</a:t>
+            </a:r>
+            <a:endParaRPr lang="en-US" sz="1300" dirty="0"/>
+          </a:p>
+          <a:p>
+            <a:pPr marL="0" indent="0">
+              <a:buNone/>
+            </a:pPr>
+            <a:r>
+              <a:rPr lang="en-US" sz="1300" dirty="0">
+                <a:solidFill>
+                  <a:srgbClr val="263238"/>
+                </a:solidFill>
+                <a:latin typeface="Courier New" pitchFamily="34" charset="0"/>
+                <a:ea typeface="Courier New" pitchFamily="34" charset="-122"/>
+                <a:cs typeface="Courier New" pitchFamily="34" charset="-120"/>
+              </a:rPr>
+              <a:t>    }</a:t>
+            </a:r>
+            <a:endParaRPr lang="en-US" sz="1300" dirty="0"/>
+          </a:p>
+          <a:p>
+            <a:pPr marL="0" indent="0">
+              <a:buNone/>
+            </a:pPr>
+            <a:endParaRPr lang="en-US" sz="1300" dirty="0"/>
+          </a:p>
+          <a:p>
+            <a:pPr marL="0" indent="0">
+              <a:buNone/>
+            </a:pPr>
+            <a:r>
+              <a:rPr lang="en-US" sz="1300" dirty="0">
+                <a:solidFill>
+                  <a:srgbClr val="263238"/>
+                </a:solidFill>
+                <a:latin typeface="Courier New" pitchFamily="34" charset="0"/>
+                <a:ea typeface="Courier New" pitchFamily="34" charset="-122"/>
+                <a:cs typeface="Courier New" pitchFamily="34" charset="-120"/>
+              </a:rPr>
+              <a:t>    @DeleteMapping("/{id}")</a:t>
+            </a:r>
+            <a:endParaRPr lang="en-US" sz="1300" dirty="0"/>
+          </a:p>
+          <a:p>
+            <a:pPr marL="0" indent="0">
+              <a:buNone/>
+            </a:pPr>
+            <a:r>
+              <a:rPr lang="en-US" sz="1300" dirty="0">
+                <a:solidFill>
+                  <a:srgbClr val="263238"/>
+                </a:solidFill>
+                <a:latin typeface="Courier New" pitchFamily="34" charset="0"/>
+                <a:ea typeface="Courier New" pitchFamily="34" charset="-122"/>
+                <a:cs typeface="Courier New" pitchFamily="34" charset="-120"/>
+              </a:rPr>
+              <a:t>    public ResponseEntity&lt;Void&gt; delete(@PathVariable Long id) {</a:t>
+            </a:r>
+            <a:endParaRPr lang="en-US" sz="1300" dirty="0"/>
+          </a:p>
+          <a:p>
+            <a:pPr marL="0" indent="0">
+              <a:buNone/>
+            </a:pPr>
+            <a:r>
+              <a:rPr lang="en-US" sz="1300" dirty="0">
+                <a:solidFill>
+                  <a:srgbClr val="263238"/>
+                </a:solidFill>
+                <a:latin typeface="Courier New" pitchFamily="34" charset="0"/>
+                <a:ea typeface="Courier New" pitchFamily="34" charset="-122"/>
+                <a:cs typeface="Courier New" pitchFamily="34" charset="-120"/>
+              </a:rPr>
+              <a:t>        libroService.delete(id);</a:t>
+            </a:r>
+            <a:endParaRPr lang="en-US" sz="1300" dirty="0"/>
+          </a:p>
+          <a:p>
+            <a:pPr marL="0" indent="0">
+              <a:buNone/>
+            </a:pPr>
+            <a:r>
+              <a:rPr lang="en-US" sz="1300" dirty="0">
+                <a:solidFill>
+                  <a:srgbClr val="263238"/>
+                </a:solidFill>
+                <a:latin typeface="Courier New" pitchFamily="34" charset="0"/>
+                <a:ea typeface="Courier New" pitchFamily="34" charset="-122"/>
+                <a:cs typeface="Courier New" pitchFamily="34" charset="-120"/>
+              </a:rPr>
+              <a:t>        return ResponseEntity.noContent().build();</a:t>
+            </a:r>
+            <a:endParaRPr lang="en-US" sz="1300" dirty="0"/>
+          </a:p>
+          <a:p>
+            <a:pPr marL="0" indent="0">
+              <a:buNone/>
+            </a:pPr>
+            <a:r>
+              <a:rPr lang="en-US" sz="1300" dirty="0">
+                <a:solidFill>
+                  <a:srgbClr val="263238"/>
+                </a:solidFill>
+                <a:latin typeface="Courier New" pitchFamily="34" charset="0"/>
+                <a:ea typeface="Courier New" pitchFamily="34" charset="-122"/>
+                <a:cs typeface="Courier New" pitchFamily="34" charset="-120"/>
+              </a:rPr>
+              <a:t>    }</a:t>
+            </a:r>
+            <a:endParaRPr lang="en-US" sz="1300" dirty="0"/>
+          </a:p>
+          <a:p>
+            <a:pPr marL="0" indent="0">
+              <a:buNone/>
+            </a:pPr>
+            <a:r>
+              <a:rPr lang="en-US" sz="1300" dirty="0">
+                <a:solidFill>
+                  <a:srgbClr val="263238"/>
+                </a:solidFill>
+                <a:latin typeface="Courier New" pitchFamily="34" charset="0"/>
+                <a:ea typeface="Courier New" pitchFamily="34" charset="-122"/>
+                <a:cs typeface="Courier New" pitchFamily="34" charset="-120"/>
+              </a:rPr>
+              <a:t>}</a:t>
+            </a:r>
+            <a:endParaRPr lang="en-US" sz="1300" dirty="0"/>
           </a:p>
         </p:txBody>
       </p:sp>
@@ -22369,9 +23224,9 @@
 </p:sld>
 </file>
 
-<file path=ppt/slides/slide40.xml><?xml version="1.0" encoding="utf-8"?>
+<file path=ppt/slides/slide42.xml><?xml version="1.0" encoding="utf-8"?>
 <p:sld xmlns:a="http://schemas.openxmlformats.org/drawingml/2006/main" xmlns:r="http://schemas.openxmlformats.org/officeDocument/2006/relationships" xmlns:p="http://schemas.openxmlformats.org/presentationml/2006/main">
-  <p:cSld name="Slide 40">
+  <p:cSld name="Slide 41">
     <p:spTree>
       <p:nvGrpSpPr>
         <p:cNvPr id="1" name=""/>
@@ -22504,477 +23359,6 @@
         </p:nvSpPr>
         <p:spPr>
           <a:xfrm>
-            <a:off x="548640" y="1554480"/>
-            <a:ext cx="11091672" cy="3840480"/>
-          </a:xfrm>
-          <a:prstGeom prst="rect">
-            <a:avLst/>
-          </a:prstGeom>
-          <a:solidFill>
-            <a:srgbClr val="ECEFF1"/>
-          </a:solidFill>
-          <a:ln w="12700">
-            <a:solidFill>
-              <a:srgbClr val="EEEEEE"/>
-            </a:solidFill>
-            <a:prstDash val="solid"/>
-          </a:ln>
-        </p:spPr>
-        <p:txBody>
-          <a:bodyPr/>
-          <a:lstStyle/>
-          <a:p>
-            <a:endParaRPr lang="es-ES"/>
-          </a:p>
-        </p:txBody>
-      </p:sp>
-      <p:sp>
-        <p:nvSpPr>
-          <p:cNvPr id="6" name="Shape 4"/>
-          <p:cNvSpPr/>
-          <p:nvPr/>
-        </p:nvSpPr>
-        <p:spPr>
-          <a:xfrm>
-            <a:off x="548640" y="1554480"/>
-            <a:ext cx="73152" cy="3840480"/>
-          </a:xfrm>
-          <a:prstGeom prst="rect">
-            <a:avLst/>
-          </a:prstGeom>
-          <a:solidFill>
-            <a:srgbClr val="E64A19"/>
-          </a:solidFill>
-          <a:ln w="12700">
-            <a:solidFill>
-              <a:srgbClr val="E64A19"/>
-            </a:solidFill>
-            <a:prstDash val="solid"/>
-          </a:ln>
-        </p:spPr>
-        <p:txBody>
-          <a:bodyPr/>
-          <a:lstStyle/>
-          <a:p>
-            <a:endParaRPr lang="es-ES"/>
-          </a:p>
-        </p:txBody>
-      </p:sp>
-      <p:sp>
-        <p:nvSpPr>
-          <p:cNvPr id="7" name="Text 5"/>
-          <p:cNvSpPr/>
-          <p:nvPr/>
-        </p:nvSpPr>
-        <p:spPr>
-          <a:xfrm>
-            <a:off x="822960" y="1664208"/>
-            <a:ext cx="10588752" cy="3621024"/>
-          </a:xfrm>
-          <a:prstGeom prst="rect">
-            <a:avLst/>
-          </a:prstGeom>
-          <a:noFill/>
-          <a:ln/>
-        </p:spPr>
-        <p:txBody>
-          <a:bodyPr wrap="square" rtlCol="0" anchor="t"/>
-          <a:lstStyle/>
-          <a:p>
-            <a:pPr marL="0" indent="0">
-              <a:buNone/>
-            </a:pPr>
-            <a:r>
-              <a:rPr lang="en-US" sz="1300" dirty="0">
-                <a:solidFill>
-                  <a:srgbClr val="263238"/>
-                </a:solidFill>
-                <a:latin typeface="Courier New" pitchFamily="34" charset="0"/>
-                <a:ea typeface="Courier New" pitchFamily="34" charset="-122"/>
-                <a:cs typeface="Courier New" pitchFamily="34" charset="-120"/>
-              </a:rPr>
-              <a:t>    @PostMapping</a:t>
-            </a:r>
-            <a:endParaRPr lang="en-US" sz="1300" dirty="0"/>
-          </a:p>
-          <a:p>
-            <a:pPr marL="0" indent="0">
-              <a:buNone/>
-            </a:pPr>
-            <a:r>
-              <a:rPr lang="en-US" sz="1300" dirty="0">
-                <a:solidFill>
-                  <a:srgbClr val="263238"/>
-                </a:solidFill>
-                <a:latin typeface="Courier New" pitchFamily="34" charset="0"/>
-                <a:ea typeface="Courier New" pitchFamily="34" charset="-122"/>
-                <a:cs typeface="Courier New" pitchFamily="34" charset="-120"/>
-              </a:rPr>
-              <a:t>    public ResponseEntity&lt;LibroResponseDTO&gt; create(@Valid @RequestBody LibroCreateDTO dto) {</a:t>
-            </a:r>
-            <a:endParaRPr lang="en-US" sz="1300" dirty="0"/>
-          </a:p>
-          <a:p>
-            <a:pPr marL="0" indent="0">
-              <a:buNone/>
-            </a:pPr>
-            <a:r>
-              <a:rPr lang="en-US" sz="1300" dirty="0">
-                <a:solidFill>
-                  <a:srgbClr val="263238"/>
-                </a:solidFill>
-                <a:latin typeface="Courier New" pitchFamily="34" charset="0"/>
-                <a:ea typeface="Courier New" pitchFamily="34" charset="-122"/>
-                <a:cs typeface="Courier New" pitchFamily="34" charset="-120"/>
-              </a:rPr>
-              <a:t>        return ResponseEntity.status(HttpStatus.CREATED).body(libroService.create(dto));</a:t>
-            </a:r>
-            <a:endParaRPr lang="en-US" sz="1300" dirty="0"/>
-          </a:p>
-          <a:p>
-            <a:pPr marL="0" indent="0">
-              <a:buNone/>
-            </a:pPr>
-            <a:r>
-              <a:rPr lang="en-US" sz="1300" dirty="0">
-                <a:solidFill>
-                  <a:srgbClr val="263238"/>
-                </a:solidFill>
-                <a:latin typeface="Courier New" pitchFamily="34" charset="0"/>
-                <a:ea typeface="Courier New" pitchFamily="34" charset="-122"/>
-                <a:cs typeface="Courier New" pitchFamily="34" charset="-120"/>
-              </a:rPr>
-              <a:t>    }</a:t>
-            </a:r>
-            <a:endParaRPr lang="en-US" sz="1300" dirty="0"/>
-          </a:p>
-          <a:p>
-            <a:pPr marL="0" indent="0">
-              <a:buNone/>
-            </a:pPr>
-            <a:endParaRPr lang="en-US" sz="1300" dirty="0"/>
-          </a:p>
-          <a:p>
-            <a:pPr marL="0" indent="0">
-              <a:buNone/>
-            </a:pPr>
-            <a:r>
-              <a:rPr lang="en-US" sz="1300" dirty="0">
-                <a:solidFill>
-                  <a:srgbClr val="263238"/>
-                </a:solidFill>
-                <a:latin typeface="Courier New" pitchFamily="34" charset="0"/>
-                <a:ea typeface="Courier New" pitchFamily="34" charset="-122"/>
-                <a:cs typeface="Courier New" pitchFamily="34" charset="-120"/>
-              </a:rPr>
-              <a:t>    @PutMapping("/{id}")</a:t>
-            </a:r>
-            <a:endParaRPr lang="en-US" sz="1300" dirty="0"/>
-          </a:p>
-          <a:p>
-            <a:pPr marL="0" indent="0">
-              <a:buNone/>
-            </a:pPr>
-            <a:r>
-              <a:rPr lang="en-US" sz="1300" dirty="0">
-                <a:solidFill>
-                  <a:srgbClr val="263238"/>
-                </a:solidFill>
-                <a:latin typeface="Courier New" pitchFamily="34" charset="0"/>
-                <a:ea typeface="Courier New" pitchFamily="34" charset="-122"/>
-                <a:cs typeface="Courier New" pitchFamily="34" charset="-120"/>
-              </a:rPr>
-              <a:t>    public ResponseEntity&lt;LibroResponseDTO&gt; update(@PathVariable Long id, @Valid @RequestBody LibroCreateDTO dto) {</a:t>
-            </a:r>
-            <a:endParaRPr lang="en-US" sz="1300" dirty="0"/>
-          </a:p>
-          <a:p>
-            <a:pPr marL="0" indent="0">
-              <a:buNone/>
-            </a:pPr>
-            <a:r>
-              <a:rPr lang="en-US" sz="1300" dirty="0">
-                <a:solidFill>
-                  <a:srgbClr val="263238"/>
-                </a:solidFill>
-                <a:latin typeface="Courier New" pitchFamily="34" charset="0"/>
-                <a:ea typeface="Courier New" pitchFamily="34" charset="-122"/>
-                <a:cs typeface="Courier New" pitchFamily="34" charset="-120"/>
-              </a:rPr>
-              <a:t>        return ResponseEntity.ok(libroService.update(id, dto));</a:t>
-            </a:r>
-            <a:endParaRPr lang="en-US" sz="1300" dirty="0"/>
-          </a:p>
-          <a:p>
-            <a:pPr marL="0" indent="0">
-              <a:buNone/>
-            </a:pPr>
-            <a:r>
-              <a:rPr lang="en-US" sz="1300" dirty="0">
-                <a:solidFill>
-                  <a:srgbClr val="263238"/>
-                </a:solidFill>
-                <a:latin typeface="Courier New" pitchFamily="34" charset="0"/>
-                <a:ea typeface="Courier New" pitchFamily="34" charset="-122"/>
-                <a:cs typeface="Courier New" pitchFamily="34" charset="-120"/>
-              </a:rPr>
-              <a:t>    }</a:t>
-            </a:r>
-            <a:endParaRPr lang="en-US" sz="1300" dirty="0"/>
-          </a:p>
-          <a:p>
-            <a:pPr marL="0" indent="0">
-              <a:buNone/>
-            </a:pPr>
-            <a:endParaRPr lang="en-US" sz="1300" dirty="0"/>
-          </a:p>
-          <a:p>
-            <a:pPr marL="0" indent="0">
-              <a:buNone/>
-            </a:pPr>
-            <a:r>
-              <a:rPr lang="en-US" sz="1300" dirty="0">
-                <a:solidFill>
-                  <a:srgbClr val="263238"/>
-                </a:solidFill>
-                <a:latin typeface="Courier New" pitchFamily="34" charset="0"/>
-                <a:ea typeface="Courier New" pitchFamily="34" charset="-122"/>
-                <a:cs typeface="Courier New" pitchFamily="34" charset="-120"/>
-              </a:rPr>
-              <a:t>    @DeleteMapping("/{id}")</a:t>
-            </a:r>
-            <a:endParaRPr lang="en-US" sz="1300" dirty="0"/>
-          </a:p>
-          <a:p>
-            <a:pPr marL="0" indent="0">
-              <a:buNone/>
-            </a:pPr>
-            <a:r>
-              <a:rPr lang="en-US" sz="1300" dirty="0">
-                <a:solidFill>
-                  <a:srgbClr val="263238"/>
-                </a:solidFill>
-                <a:latin typeface="Courier New" pitchFamily="34" charset="0"/>
-                <a:ea typeface="Courier New" pitchFamily="34" charset="-122"/>
-                <a:cs typeface="Courier New" pitchFamily="34" charset="-120"/>
-              </a:rPr>
-              <a:t>    public ResponseEntity&lt;Void&gt; delete(@PathVariable Long id) {</a:t>
-            </a:r>
-            <a:endParaRPr lang="en-US" sz="1300" dirty="0"/>
-          </a:p>
-          <a:p>
-            <a:pPr marL="0" indent="0">
-              <a:buNone/>
-            </a:pPr>
-            <a:r>
-              <a:rPr lang="en-US" sz="1300" dirty="0">
-                <a:solidFill>
-                  <a:srgbClr val="263238"/>
-                </a:solidFill>
-                <a:latin typeface="Courier New" pitchFamily="34" charset="0"/>
-                <a:ea typeface="Courier New" pitchFamily="34" charset="-122"/>
-                <a:cs typeface="Courier New" pitchFamily="34" charset="-120"/>
-              </a:rPr>
-              <a:t>        libroService.delete(id);</a:t>
-            </a:r>
-            <a:endParaRPr lang="en-US" sz="1300" dirty="0"/>
-          </a:p>
-          <a:p>
-            <a:pPr marL="0" indent="0">
-              <a:buNone/>
-            </a:pPr>
-            <a:r>
-              <a:rPr lang="en-US" sz="1300" dirty="0">
-                <a:solidFill>
-                  <a:srgbClr val="263238"/>
-                </a:solidFill>
-                <a:latin typeface="Courier New" pitchFamily="34" charset="0"/>
-                <a:ea typeface="Courier New" pitchFamily="34" charset="-122"/>
-                <a:cs typeface="Courier New" pitchFamily="34" charset="-120"/>
-              </a:rPr>
-              <a:t>        return ResponseEntity.noContent().build();</a:t>
-            </a:r>
-            <a:endParaRPr lang="en-US" sz="1300" dirty="0"/>
-          </a:p>
-          <a:p>
-            <a:pPr marL="0" indent="0">
-              <a:buNone/>
-            </a:pPr>
-            <a:r>
-              <a:rPr lang="en-US" sz="1300" dirty="0">
-                <a:solidFill>
-                  <a:srgbClr val="263238"/>
-                </a:solidFill>
-                <a:latin typeface="Courier New" pitchFamily="34" charset="0"/>
-                <a:ea typeface="Courier New" pitchFamily="34" charset="-122"/>
-                <a:cs typeface="Courier New" pitchFamily="34" charset="-120"/>
-              </a:rPr>
-              <a:t>    }</a:t>
-            </a:r>
-            <a:endParaRPr lang="en-US" sz="1300" dirty="0"/>
-          </a:p>
-          <a:p>
-            <a:pPr marL="0" indent="0">
-              <a:buNone/>
-            </a:pPr>
-            <a:r>
-              <a:rPr lang="en-US" sz="1300" dirty="0">
-                <a:solidFill>
-                  <a:srgbClr val="263238"/>
-                </a:solidFill>
-                <a:latin typeface="Courier New" pitchFamily="34" charset="0"/>
-                <a:ea typeface="Courier New" pitchFamily="34" charset="-122"/>
-                <a:cs typeface="Courier New" pitchFamily="34" charset="-120"/>
-              </a:rPr>
-              <a:t>}</a:t>
-            </a:r>
-            <a:endParaRPr lang="en-US" sz="1300" dirty="0"/>
-          </a:p>
-        </p:txBody>
-      </p:sp>
-    </p:spTree>
-  </p:cSld>
-  <p:clrMapOvr>
-    <a:masterClrMapping/>
-  </p:clrMapOvr>
-</p:sld>
-</file>
-
-<file path=ppt/slides/slide41.xml><?xml version="1.0" encoding="utf-8"?>
-<p:sld xmlns:a="http://schemas.openxmlformats.org/drawingml/2006/main" xmlns:r="http://schemas.openxmlformats.org/officeDocument/2006/relationships" xmlns:p="http://schemas.openxmlformats.org/presentationml/2006/main">
-  <p:cSld name="Slide 41">
-    <p:spTree>
-      <p:nvGrpSpPr>
-        <p:cNvPr id="1" name=""/>
-        <p:cNvGrpSpPr/>
-        <p:nvPr/>
-      </p:nvGrpSpPr>
-      <p:grpSpPr>
-        <a:xfrm>
-          <a:off x="0" y="0"/>
-          <a:ext cx="0" cy="0"/>
-          <a:chOff x="0" y="0"/>
-          <a:chExt cx="0" cy="0"/>
-        </a:xfrm>
-      </p:grpSpPr>
-      <p:sp>
-        <p:nvSpPr>
-          <p:cNvPr id="2" name="Shape 0"/>
-          <p:cNvSpPr/>
-          <p:nvPr/>
-        </p:nvSpPr>
-        <p:spPr>
-          <a:xfrm>
-            <a:off x="0" y="0"/>
-            <a:ext cx="12188952" cy="777240"/>
-          </a:xfrm>
-          <a:prstGeom prst="rect">
-            <a:avLst/>
-          </a:prstGeom>
-          <a:solidFill>
-            <a:srgbClr val="7F0000"/>
-          </a:solidFill>
-          <a:ln w="12700">
-            <a:solidFill>
-              <a:srgbClr val="7F0000"/>
-            </a:solidFill>
-            <a:prstDash val="solid"/>
-          </a:ln>
-        </p:spPr>
-        <p:txBody>
-          <a:bodyPr/>
-          <a:lstStyle/>
-          <a:p>
-            <a:endParaRPr lang="es-ES"/>
-          </a:p>
-        </p:txBody>
-      </p:sp>
-      <p:sp>
-        <p:nvSpPr>
-          <p:cNvPr id="3" name="Text 1"/>
-          <p:cNvSpPr/>
-          <p:nvPr/>
-        </p:nvSpPr>
-        <p:spPr>
-          <a:xfrm>
-            <a:off x="365760" y="0"/>
-            <a:ext cx="11457432" cy="777240"/>
-          </a:xfrm>
-          <a:prstGeom prst="rect">
-            <a:avLst/>
-          </a:prstGeom>
-          <a:noFill/>
-          <a:ln/>
-        </p:spPr>
-        <p:txBody>
-          <a:bodyPr wrap="square" rtlCol="0" anchor="ctr"/>
-          <a:lstStyle/>
-          <a:p>
-            <a:pPr marL="0" indent="0">
-              <a:buNone/>
-            </a:pPr>
-            <a:r>
-              <a:rPr lang="en-US" sz="2600" b="1" dirty="0">
-                <a:solidFill>
-                  <a:srgbClr val="FFFFFF"/>
-                </a:solidFill>
-                <a:latin typeface="Arial" pitchFamily="34" charset="0"/>
-                <a:ea typeface="Arial" pitchFamily="34" charset="-122"/>
-                <a:cs typeface="Arial" pitchFamily="34" charset="-120"/>
-              </a:rPr>
-              <a:t>El LibroController completo (cont.)</a:t>
-            </a:r>
-            <a:endParaRPr lang="en-US" sz="2600" dirty="0"/>
-          </a:p>
-        </p:txBody>
-      </p:sp>
-      <p:sp>
-        <p:nvSpPr>
-          <p:cNvPr id="4" name="Text 2"/>
-          <p:cNvSpPr/>
-          <p:nvPr/>
-        </p:nvSpPr>
-        <p:spPr>
-          <a:xfrm>
-            <a:off x="548640" y="6473952"/>
-            <a:ext cx="11091672" cy="292608"/>
-          </a:xfrm>
-          <a:prstGeom prst="rect">
-            <a:avLst/>
-          </a:prstGeom>
-          <a:noFill/>
-          <a:ln/>
-        </p:spPr>
-        <p:txBody>
-          <a:bodyPr wrap="square" rtlCol="0" anchor="ctr"/>
-          <a:lstStyle/>
-          <a:p>
-            <a:pPr marL="0" indent="0" algn="r">
-              <a:buNone/>
-            </a:pPr>
-            <a:r>
-              <a:rPr lang="en-US" sz="1100" dirty="0">
-                <a:solidFill>
-                  <a:srgbClr val="757575"/>
-                </a:solidFill>
-                <a:latin typeface="Arial" pitchFamily="34" charset="0"/>
-                <a:ea typeface="Arial" pitchFamily="34" charset="-122"/>
-                <a:cs typeface="Arial" pitchFamily="34" charset="-120"/>
-              </a:rPr>
-              <a:t>Acceso a Datos — Tema 1: CRUD y transacciones</a:t>
-            </a:r>
-            <a:endParaRPr lang="en-US" sz="1100" dirty="0"/>
-          </a:p>
-        </p:txBody>
-      </p:sp>
-      <p:sp>
-        <p:nvSpPr>
-          <p:cNvPr id="5" name="Shape 3"/>
-          <p:cNvSpPr/>
-          <p:nvPr/>
-        </p:nvSpPr>
-        <p:spPr>
-          <a:xfrm>
             <a:off x="548640" y="2377440"/>
             <a:ext cx="11091672" cy="2011680"/>
           </a:xfrm>
@@ -23085,7 +23469,7 @@
 </p:sld>
 </file>
 
-<file path=ppt/slides/slide42.xml><?xml version="1.0" encoding="utf-8"?>
+<file path=ppt/slides/slide43.xml><?xml version="1.0" encoding="utf-8"?>
 <p:sld xmlns:a="http://schemas.openxmlformats.org/drawingml/2006/main" xmlns:r="http://schemas.openxmlformats.org/officeDocument/2006/relationships" xmlns:p="http://schemas.openxmlformats.org/presentationml/2006/main">
   <p:cSld name="Slide 42">
     <p:spTree>
@@ -23284,7 +23668,7 @@
 </p:sld>
 </file>
 
-<file path=ppt/slides/slide43.xml><?xml version="1.0" encoding="utf-8"?>
+<file path=ppt/slides/slide44.xml><?xml version="1.0" encoding="utf-8"?>
 <p:sld xmlns:a="http://schemas.openxmlformats.org/drawingml/2006/main" xmlns:r="http://schemas.openxmlformats.org/officeDocument/2006/relationships" xmlns:p="http://schemas.openxmlformats.org/presentationml/2006/main">
   <p:cSld name="Slide 43">
     <p:spTree>
@@ -23546,7 +23930,7 @@
 </p:sld>
 </file>
 
-<file path=ppt/slides/slide44.xml><?xml version="1.0" encoding="utf-8"?>
+<file path=ppt/slides/slide45.xml><?xml version="1.0" encoding="utf-8"?>
 <p:sld xmlns:a="http://schemas.openxmlformats.org/drawingml/2006/main" xmlns:r="http://schemas.openxmlformats.org/officeDocument/2006/relationships" xmlns:p="http://schemas.openxmlformats.org/presentationml/2006/main">
   <p:cSld name="Slide 44">
     <p:spTree>
